--- a/presentations/prFBA_updates_2026-10.pptx
+++ b/presentations/prFBA_updates_2026-10.pptx
@@ -4164,7 +4164,7 @@
           <a:lstStyle/>
           <a:p>
             <a:r>
-              <a:t>Density ranking is stable in k — Spearman 0.964 between the 21st and 50th nearest neighbour. The figure predates the random panel; its decile shares are in the caption.</a:t>
+              <a:t>Density ranking is stable in k — Spearman 0.964 between the 21st and 50th nearest neighbour. Panel C is the uniform-random panel; all 10,000 of its organisms sit on the clusterable set. The manuscript's figure (F16) is still the two-panel version.</a:t>
             </a:r>
           </a:p>
         </p:txBody>
@@ -18684,7 +18684,7 @@
       </p:sp>
       <p:pic>
         <p:nvPicPr>
-          <p:cNvPr id="3" name="Picture 2" descr="F_panel_space.png"/>
+          <p:cNvPr id="3" name="Picture 2" descr="F_panel_space_three.png"/>
           <p:cNvPicPr>
             <a:picLocks noChangeAspect="1"/>
           </p:cNvPicPr>
@@ -18698,8 +18698,8 @@
         </p:blipFill>
         <p:spPr>
           <a:xfrm>
-            <a:off x="795528" y="1298448"/>
-            <a:ext cx="10607040" cy="4277032"/>
+            <a:off x="548640" y="1325880"/>
+            <a:ext cx="11094415" cy="3315714"/>
           </a:xfrm>
           <a:prstGeom prst="rect">
             <a:avLst/>
@@ -18714,8 +18714,8 @@
         </p:nvSpPr>
         <p:spPr>
           <a:xfrm>
-            <a:off x="548640" y="5650992"/>
-            <a:ext cx="11094415" cy="640080"/>
+            <a:off x="548640" y="4864608"/>
+            <a:ext cx="11094415" cy="1097280"/>
           </a:xfrm>
           <a:prstGeom prst="rect">
             <a:avLst/>
@@ -18733,17 +18733,36 @@
                 <a:spcPct val="106000"/>
               </a:lnSpc>
               <a:spcAft>
+                <a:spcPts val="600"/>
+              </a:spcAft>
+            </a:pPr>
+            <a:r>
+              <a:rPr sz="1200" b="0" i="0">
+                <a:solidFill>
+                  <a:srgbClr val="5B7179"/>
+                </a:solidFill>
+                <a:latin typeface="Calibri"/>
+              </a:rPr>
+              <a:t>The stratified panel over-weights the sparse space hardest — 49.1% of its picks from the two sparsest deciles, against 36.6% for k-means — while the random panel (C) tracks the population: 23.8% against 19.2%, and 12.4% of picks in the densest decile against the population's 12.6% (stratified 0.8%, k-means 4.1%). The dense deciles are where self-exclusion empties a 20-hit record.</a:t>
+            </a:r>
+          </a:p>
+          <a:p>
+            <a:pPr algn="l">
+              <a:lnSpc>
+                <a:spcPct val="104000"/>
+              </a:lnSpc>
+              <a:spcAft>
                 <a:spcPts val="0"/>
               </a:spcAft>
             </a:pPr>
             <a:r>
-              <a:rPr sz="1200" b="0" i="0">
+              <a:rPr sz="1100" b="0" i="0">
                 <a:solidFill>
                   <a:srgbClr val="5B7179"/>
                 </a:solidFill>
                 <a:latin typeface="Calibri"/>
               </a:rPr>
-              <a:t>The stratified panel over-weights the sparse space hardest — 49.1% of its picks from the two sparsest deciles, against 36.6% for k-means — while the random panel (not drawn) tracks the population: 23.8% against 19.2%, and 12.4% of picks in the densest decile against the population's 12.6% (stratified 0.8%, k-means 4.1%). The dense deciles are where self-exclusion empties a 20-hit record.</a:t>
+              <a:t>Black ticks in D are each decile's share of all sequences: the density measure is heavily tied (166 distinct values), so the deciles hold 7.7–12.6% of sequences rather than 10% each.</a:t>
             </a:r>
           </a:p>
         </p:txBody>
@@ -18782,7 +18801,7 @@
                 </a:solidFill>
                 <a:latin typeface="Calibri"/>
               </a:rPr>
-              <a:t>9,097 of the original panel's 10,000 organisms have a position in this space (the rest have short or atypical 16S, or a sequence the index credits to no admissible taxon); shares are of each panel's on-frame picks</a:t>
+              <a:t>9,097 of the original panel's 10,000 organisms have a position in this space (the rest have short or atypical 16S, or a sequence the index credits to no admissible taxon); all 10,000 k-means and random picks do. Shares are of each panel's on-frame picks</a:t>
             </a:r>
           </a:p>
         </p:txBody>

--- a/presentations/prFBA_updates_2026-10.pptx
+++ b/presentations/prFBA_updates_2026-10.pptx
@@ -160,7 +160,7 @@
                 </a:solidFill>
                 <a:latin typeface="Calibri"/>
               </a:rPr>
-              <a:t>Share of wall time, by stage</a:t>
+              <a:t>Share of wall time, depth-100 run (all 500 rescored)</a:t>
             </a:r>
           </a:p>
         </c:rich>
@@ -9637,7 +9637,7 @@
           <a:lstStyle/>
           <a:p>
             <a:r>
-              <a:t>Stage 1 scans all 459,301 unique references with edlib in infix mode and keeps the 500 closest per amplicon; it runs identically on every machine and took 70% of the 6.9 h that the depth-100 run needed for 60,461 unique amplicons. Stage 2 scores the shortlist with the GPU Smith-Waterman kernel, which on an exhaustive sweep reached 57.3 GCUPS on one RTX 5070 Ti, 7.8 times a 60-process Biopython CPU baseline, and is bit-exact to Biopython on 400/400 control pairs. Stage 3 re-aligns candidates with Biopython to recover identity and coverage; at the standard setting it rescores the whole 500-candidate shortlist and keeps 100 hits, so the GPU stage re-ranks but no longer prunes, and the record does not depend on the scoring backend. That full rescore, not the 100-hit record, is what makes the Biopython stage 29% of the wall time; the depth-20 run rescored only the 100 best GPU candidates. Retrieval is exact rather than approximate because a nucleotide-transformer embedding put the true best hit first only 50.5% of the time, against 75.5% for a k-mer retriever, and random 16S pairs already average cosine 0.90. The CUDA kernel is now the standalone gpusw package, reusable outside this project.</a:t>
+              <a:t>Stage 1 scans all 459,301 unique references with edlib in infix mode and keeps the 500 closest per amplicon; it runs identically on every machine and took 70% of the 6.9 h that the depth-100 run needed for 60,461 unique amplicons. Stage 2 scores the shortlist with the GPU Smith-Waterman kernel, which on an exhaustive sweep reached 57.3 GCUPS on one RTX 5070 Ti, 7.8 times a 60-process Biopython CPU baseline, and is bit-exact to Biopython on 400/400 control pairs. Stage 3 re-aligns candidates with Biopython to recover identity and coverage. The standard setting re-aligns the GPU's best 200, taken in the rescore's own order (score, then edit distance, then reference index), and keeps 100; the GPU score is bit-exact to Biopython's on every hit of the depth-100 records, so that pick always contains the record, and re-aligning 200 instead of all 500, as the depth-100 run did, reproduces all 60,461 of its records exactly while shortening the Biopython stage by about 19%. Biopython is still needed because the GPU kernel is score-only: the alignment itself gives identity, aligned length and coordinates, at about 25 ms per traceback against 2.4 ms per re-score, so the 100 tracebacks per record, not the re-scoring, are most of the Biopython stage's 29% of the depth-100 run's wall time. Retrieval is exact rather than approximate because a nucleotide-transformer embedding put the true best hit first only 50.5% of the time, against 75.5% for a k-mer retriever, and random 16S pairs already average cosine 0.90. The CUDA kernel is now the standalone gpusw package, reusable outside this project.</a:t>
             </a:r>
           </a:p>
         </p:txBody>
@@ -34157,7 +34157,7 @@
                 </a:solidFill>
                 <a:latin typeface="Calibri"/>
               </a:rPr>
-              <a:t>A 100-hit record from a 500-candidate shortlist, rescored in full</a:t>
+              <a:t>A 100-hit record: the GPU keeps the best 200 of a 500-candidate shortlist</a:t>
             </a:r>
           </a:p>
         </p:txBody>
@@ -34357,7 +34357,7 @@
                 </a:solidFill>
                 <a:latin typeface="Calibri"/>
               </a:rPr>
-              <a:t>re-ranks 500, prunes none</a:t>
+              <a:t>keeps best 200 of 500</a:t>
             </a:r>
           </a:p>
         </p:txBody>
@@ -34479,7 +34479,7 @@
                 </a:solidFill>
                 <a:latin typeface="Calibri"/>
               </a:rPr>
-              <a:t>500 rescored → 100 kept</a:t>
+              <a:t>200 aligned → 100 kept</a:t>
             </a:r>
           </a:p>
         </p:txBody>

--- a/presentations/prFBA_updates_2026-10.pptx
+++ b/presentations/prFBA_updates_2026-10.pptx
@@ -160,7 +160,7 @@
                 </a:solidFill>
                 <a:latin typeface="Calibri"/>
               </a:rPr>
-              <a:t>Share of wall time, depth-100 run (all 500 rescored)</a:t>
+              <a:t>Hours per stage, depth-100 records</a:t>
             </a:r>
           </a:p>
         </c:rich>
@@ -182,43 +182,24 @@
               <c:strCache>
                 <c:ptCount val="1"/>
                 <c:pt idx="0">
-                  <c:v>v</c:v>
+                  <c:v>re-score all 500, then align</c:v>
                 </c:pt>
               </c:strCache>
             </c:strRef>
           </c:tx>
-          <c:dPt>
-            <c:idx val="0"/>
-            <c:spPr>
-              <a:solidFill>
-                <a:srgbClr val="00A896"/>
-              </a:solidFill>
-            </c:spPr>
-          </c:dPt>
-          <c:dPt>
-            <c:idx val="1"/>
-            <c:spPr>
-              <a:solidFill>
-                <a:srgbClr val="00A896"/>
-              </a:solidFill>
-            </c:spPr>
-          </c:dPt>
-          <c:dPt>
-            <c:idx val="2"/>
-            <c:spPr>
-              <a:solidFill>
-                <a:srgbClr val="028090"/>
-              </a:solidFill>
-            </c:spPr>
-          </c:dPt>
+          <c:spPr>
+            <a:solidFill>
+              <a:srgbClr val="A7B8BC"/>
+            </a:solidFill>
+          </c:spPr>
           <c:dLbls>
-            <c:numFmt formatCode="0%" sourceLinked="0"/>
+            <c:numFmt formatCode="0.0&quot; h&quot;" sourceLinked="0"/>
             <c:txPr>
               <a:bodyPr/>
               <a:lstStyle/>
               <a:p>
                 <a:pPr>
-                  <a:defRPr sz="1400" b="1">
+                  <a:defRPr sz="1200" b="1">
                     <a:solidFill>
                       <a:srgbClr val="10292E"/>
                     </a:solidFill>
@@ -242,7 +223,7 @@
               <c:strCache>
                 <c:ptCount val="3"/>
                 <c:pt idx="0">
-                  <c:v>Biopython rescore</c:v>
+                  <c:v>Biopython</c:v>
                 </c:pt>
                 <c:pt idx="1">
                   <c:v>GPU Smith-Waterman</c:v>
@@ -257,22 +238,103 @@
             <c:numRef>
               <c:f>Sheet1!$B$2:$B$4</c:f>
               <c:numCache>
-                <c:formatCode>0%</c:formatCode>
+                <c:formatCode>0.0" h"</c:formatCode>
                 <c:ptCount val="3"/>
                 <c:pt idx="0">
-                  <c:v>0.2857062692645308</c:v>
+                  <c:v>1.98</c:v>
                 </c:pt>
                 <c:pt idx="1">
-                  <c:v>0.012882434756119556</c:v>
+                  <c:v>0.08927777777777778</c:v>
                 </c:pt>
                 <c:pt idx="2">
-                  <c:v>0.7002288696405022</c:v>
+                  <c:v>4.852722222222222</c:v>
+                </c:pt>
+              </c:numCache>
+            </c:numRef>
+          </c:val>
+        </c:ser>
+        <c:ser>
+          <c:idx val="1"/>
+          <c:order val="1"/>
+          <c:tx>
+            <c:strRef>
+              <c:f>Sheet1!$C$1</c:f>
+              <c:strCache>
+                <c:ptCount val="1"/>
+                <c:pt idx="0">
+                  <c:v>align the GPU's top 100 (now)</c:v>
+                </c:pt>
+              </c:strCache>
+            </c:strRef>
+          </c:tx>
+          <c:spPr>
+            <a:solidFill>
+              <a:srgbClr val="028090"/>
+            </a:solidFill>
+          </c:spPr>
+          <c:dLbls>
+            <c:numFmt formatCode="0.0&quot; h&quot;" sourceLinked="0"/>
+            <c:txPr>
+              <a:bodyPr/>
+              <a:lstStyle/>
+              <a:p>
+                <a:pPr>
+                  <a:defRPr sz="1200" b="1">
+                    <a:solidFill>
+                      <a:srgbClr val="10292E"/>
+                    </a:solidFill>
+                    <a:latin typeface="Calibri"/>
+                  </a:defRPr>
+                </a:pPr>
+              </a:p>
+            </c:txPr>
+            <c:dLblPos val="outEnd"/>
+            <c:showLegendKey val="0"/>
+            <c:showVal val="1"/>
+            <c:showCatName val="0"/>
+            <c:showSerName val="0"/>
+            <c:showPercent val="0"/>
+            <c:showBubbleSize val="0"/>
+            <c:showLeaderLines val="1"/>
+          </c:dLbls>
+          <c:cat>
+            <c:strRef>
+              <c:f>Sheet1!$A$2:$A$4</c:f>
+              <c:strCache>
+                <c:ptCount val="3"/>
+                <c:pt idx="0">
+                  <c:v>Biopython</c:v>
+                </c:pt>
+                <c:pt idx="1">
+                  <c:v>GPU Smith-Waterman</c:v>
+                </c:pt>
+                <c:pt idx="2">
+                  <c:v>edlib prefilter</c:v>
+                </c:pt>
+              </c:strCache>
+            </c:strRef>
+          </c:cat>
+          <c:val>
+            <c:numRef>
+              <c:f>Sheet1!$C$2:$C$4</c:f>
+              <c:numCache>
+                <c:formatCode>0.0" h"</c:formatCode>
+                <c:ptCount val="3"/>
+                <c:pt idx="0">
+                  <c:v>0.9513888888888888</c:v>
+                </c:pt>
+                <c:pt idx="1">
+                  <c:v>0.08927777777777778</c:v>
+                </c:pt>
+                <c:pt idx="2">
+                  <c:v>4.852722222222222</c:v>
                 </c:pt>
               </c:numCache>
             </c:numRef>
           </c:val>
         </c:ser>
         <c:gapWidth val="45"/>
+        <c:overlap val="-10"/>
         <c:axId val="-2068027336"/>
         <c:axId val="-2113994440"/>
       </c:barChart>
@@ -309,7 +371,7 @@
       <c:valAx>
         <c:axId val="-2113994440"/>
         <c:scaling>
-          <c:max val="1.0"/>
+          <c:max val="6.0"/>
           <c:min val="0.0"/>
         </c:scaling>
         <c:delete/>
@@ -339,6 +401,23 @@
         <c:crosses val="autoZero"/>
       </c:valAx>
     </c:plotArea>
+    <c:legend>
+      <c:legendPos val="b"/>
+      <c:overlay val="0"/>
+      <c:txPr>
+        <a:bodyPr/>
+        <a:lstStyle/>
+        <a:p>
+          <a:pPr>
+            <a:defRPr sz="1100">
+              <a:solidFill>
+                <a:srgbClr val="10292E"/>
+              </a:solidFill>
+            </a:defRPr>
+          </a:pPr>
+        </a:p>
+      </c:txPr>
+    </c:legend>
     <c:dispBlanksAs val="gap"/>
   </c:chart>
   <c:txPr>
@@ -946,7 +1025,7 @@
             <c:idx val="3"/>
             <c:spPr>
               <a:solidFill>
-                <a:srgbClr val="A7B8BC"/>
+                <a:srgbClr val="028090"/>
               </a:solidFill>
             </c:spPr>
           </c:dPt>
@@ -954,7 +1033,7 @@
             <c:idx val="4"/>
             <c:spPr>
               <a:solidFill>
-                <a:srgbClr val="028090"/>
+                <a:srgbClr val="A7B8BC"/>
               </a:solidFill>
             </c:spPr>
           </c:dPt>
@@ -962,12 +1041,20 @@
             <c:idx val="5"/>
             <c:spPr>
               <a:solidFill>
+                <a:srgbClr val="028090"/>
+              </a:solidFill>
+            </c:spPr>
+          </c:dPt>
+          <c:dPt>
+            <c:idx val="6"/>
+            <c:spPr>
+              <a:solidFill>
                 <a:srgbClr val="E8871A"/>
               </a:solidFill>
             </c:spPr>
           </c:dPt>
           <c:dPt>
-            <c:idx val="6"/>
+            <c:idx val="7"/>
             <c:spPr>
               <a:solidFill>
                 <a:srgbClr val="A7B8BC"/>
@@ -1001,9 +1088,9 @@
           </c:dLbls>
           <c:cat>
             <c:strRef>
-              <c:f>Sheet1!$A$2:$A$8</c:f>
+              <c:f>Sheet1!$A$2:$A$9</c:f>
               <c:strCache>
-                <c:ptCount val="7"/>
+                <c:ptCount val="8"/>
                 <c:pt idx="0">
                   <c:v>Constant floor</c:v>
                 </c:pt>
@@ -1011,18 +1098,21 @@
                   <c:v>Random abstain</c:v>
                 </c:pt>
                 <c:pt idx="2">
-                  <c:v>prFBA</c:v>
+                  <c:v>prFBA, exact-tie (shipped)</c:v>
                 </c:pt>
                 <c:pt idx="3">
+                  <c:v>prFBA, pre-registered (legacy)</c:v>
+                </c:pt>
+                <c:pt idx="4">
                   <c:v>Copy nearest reference</c:v>
                 </c:pt>
-                <c:pt idx="4">
+                <c:pt idx="5">
                   <c:v>prFBA, forced to answer</c:v>
                 </c:pt>
-                <c:pt idx="5">
+                <c:pt idx="6">
                   <c:v>PICRUSt2</c:v>
                 </c:pt>
-                <c:pt idx="6">
+                <c:pt idx="7">
                   <c:v>Clade-max oracle</c:v>
                 </c:pt>
               </c:strCache>
@@ -1030,10 +1120,10 @@
           </c:cat>
           <c:val>
             <c:numRef>
-              <c:f>Sheet1!$B$2:$B$8</c:f>
+              <c:f>Sheet1!$B$2:$B$9</c:f>
               <c:numCache>
                 <c:formatCode>0.000</c:formatCode>
-                <c:ptCount val="7"/>
+                <c:ptCount val="8"/>
                 <c:pt idx="0">
                   <c:v>0.6461</c:v>
                 </c:pt>
@@ -1041,18 +1131,21 @@
                   <c:v>0.6661</c:v>
                 </c:pt>
                 <c:pt idx="2">
+                  <c:v>0.6849</c:v>
+                </c:pt>
+                <c:pt idx="3">
                   <c:v>0.6867</c:v>
                 </c:pt>
-                <c:pt idx="3">
+                <c:pt idx="4">
                   <c:v>0.7451</c:v>
                 </c:pt>
-                <c:pt idx="4">
+                <c:pt idx="5">
                   <c:v>0.7473</c:v>
                 </c:pt>
-                <c:pt idx="5">
+                <c:pt idx="6">
                   <c:v>0.7787</c:v>
                 </c:pt>
-                <c:pt idx="6">
+                <c:pt idx="7">
                   <c:v>0.7897</c:v>
                 </c:pt>
               </c:numCache>
@@ -2706,7 +2799,7 @@
                         </a:solidFill>
                         <a:latin typeface="Calibri"/>
                       </a:rPr>
-                      <a:t>+0.122</a:t>
+                      <a:t>+0.103</a:t>
                     </a:r>
                   </a:p>
                 </c:rich>
@@ -2733,7 +2826,7 @@
                         </a:solidFill>
                         <a:latin typeface="Calibri"/>
                       </a:rPr>
-                      <a:t>+0.096</a:t>
+                      <a:t>+0.077</a:t>
                     </a:r>
                   </a:p>
                 </c:rich>
@@ -2811,46 +2904,46 @@
                 <c:formatCode>0.000</c:formatCode>
                 <c:ptCount val="14"/>
                 <c:pt idx="0">
-                  <c:v>0.1219</c:v>
+                  <c:v>0.103</c:v>
                 </c:pt>
                 <c:pt idx="1">
-                  <c:v>0.1225</c:v>
+                  <c:v>0.1037</c:v>
                 </c:pt>
                 <c:pt idx="2">
-                  <c:v>0.1217</c:v>
+                  <c:v>0.1026</c:v>
                 </c:pt>
                 <c:pt idx="3">
-                  <c:v>0.1207</c:v>
+                  <c:v>0.1021</c:v>
                 </c:pt>
                 <c:pt idx="4">
-                  <c:v>0.1199</c:v>
+                  <c:v>0.101</c:v>
                 </c:pt>
                 <c:pt idx="5">
-                  <c:v>0.1216</c:v>
+                  <c:v>0.1033</c:v>
                 </c:pt>
                 <c:pt idx="6">
-                  <c:v>0.1186</c:v>
+                  <c:v>0.0996</c:v>
                 </c:pt>
                 <c:pt idx="7">
-                  <c:v>0.119</c:v>
+                  <c:v>0.1003</c:v>
                 </c:pt>
                 <c:pt idx="8">
-                  <c:v>0.1174</c:v>
+                  <c:v>0.099</c:v>
                 </c:pt>
                 <c:pt idx="9">
-                  <c:v>0.1158</c:v>
+                  <c:v>0.0966</c:v>
                 </c:pt>
                 <c:pt idx="10">
-                  <c:v>0.1087</c:v>
+                  <c:v>0.0913</c:v>
                 </c:pt>
                 <c:pt idx="11">
-                  <c:v>0.1068</c:v>
+                  <c:v>0.0876</c:v>
                 </c:pt>
                 <c:pt idx="12">
-                  <c:v>0.1047</c:v>
+                  <c:v>0.0866</c:v>
                 </c:pt>
                 <c:pt idx="13">
-                  <c:v>0.0961</c:v>
+                  <c:v>0.0767</c:v>
                 </c:pt>
               </c:numCache>
             </c:numRef>
@@ -2907,7 +3000,7 @@
                         </a:solidFill>
                         <a:latin typeface="Calibri"/>
                       </a:rPr>
-                      <a:t>+0.192</a:t>
+                      <a:t>+0.212</a:t>
                     </a:r>
                   </a:p>
                 </c:rich>
@@ -2934,7 +3027,7 @@
                         </a:solidFill>
                         <a:latin typeface="Calibri"/>
                       </a:rPr>
-                      <a:t>+0.169</a:t>
+                      <a:t>+0.190</a:t>
                     </a:r>
                   </a:p>
                 </c:rich>
@@ -3012,46 +3105,46 @@
                 <c:formatCode>0.000</c:formatCode>
                 <c:ptCount val="14"/>
                 <c:pt idx="0">
-                  <c:v>0.1917</c:v>
+                  <c:v>0.2121</c:v>
                 </c:pt>
                 <c:pt idx="1">
-                  <c:v>0.1938</c:v>
+                  <c:v>0.2145</c:v>
                 </c:pt>
                 <c:pt idx="2">
-                  <c:v>0.1923</c:v>
+                  <c:v>0.213</c:v>
                 </c:pt>
                 <c:pt idx="3">
-                  <c:v>0.1925</c:v>
+                  <c:v>0.2133</c:v>
                 </c:pt>
                 <c:pt idx="4">
-                  <c:v>0.192</c:v>
+                  <c:v>0.2127</c:v>
                 </c:pt>
                 <c:pt idx="5">
-                  <c:v>0.1924</c:v>
+                  <c:v>0.2133</c:v>
                 </c:pt>
                 <c:pt idx="6">
-                  <c:v>0.1926</c:v>
+                  <c:v>0.2134</c:v>
                 </c:pt>
                 <c:pt idx="7">
-                  <c:v>0.1883</c:v>
+                  <c:v>0.2106</c:v>
                 </c:pt>
                 <c:pt idx="8">
-                  <c:v>0.1897</c:v>
+                  <c:v>0.2109</c:v>
                 </c:pt>
                 <c:pt idx="9">
-                  <c:v>0.1866</c:v>
+                  <c:v>0.208</c:v>
                 </c:pt>
                 <c:pt idx="10">
-                  <c:v>0.1812</c:v>
+                  <c:v>0.2019</c:v>
                 </c:pt>
                 <c:pt idx="11">
-                  <c:v>0.1758</c:v>
+                  <c:v>0.1974</c:v>
                 </c:pt>
                 <c:pt idx="12">
-                  <c:v>0.1769</c:v>
+                  <c:v>0.1992</c:v>
                 </c:pt>
                 <c:pt idx="13">
-                  <c:v>0.1692</c:v>
+                  <c:v>0.1903</c:v>
                 </c:pt>
               </c:numCache>
             </c:numRef>
@@ -3847,16 +3940,16 @@
                 <c:formatCode>0.00</c:formatCode>
                 <c:ptCount val="4"/>
                 <c:pt idx="0">
-                  <c:v>0.6406120972110716</c:v>
+                  <c:v>0.6152918412949673</c:v>
                 </c:pt>
                 <c:pt idx="1">
-                  <c:v>0.8570484917275345</c:v>
+                  <c:v>0.8554478658764634</c:v>
                 </c:pt>
                 <c:pt idx="2">
-                  <c:v>0.5795572890614992</c:v>
+                  <c:v>0.5513590708337458</c:v>
                 </c:pt>
                 <c:pt idx="3">
-                  <c:v>0.5705905597819595</c:v>
+                  <c:v>0.5548906545631169</c:v>
                 </c:pt>
               </c:numCache>
             </c:numRef>
@@ -3933,16 +4026,16 @@
                 <c:formatCode>0.00</c:formatCode>
                 <c:ptCount val="4"/>
                 <c:pt idx="0">
-                  <c:v>0.44133987404915564</c:v>
+                  <c:v>0.4308196690748576</c:v>
                 </c:pt>
                 <c:pt idx="1">
-                  <c:v>0.6661407285695117</c:v>
+                  <c:v>0.66535169007807</c:v>
                 </c:pt>
                 <c:pt idx="2">
-                  <c:v>0.620430110952459</c:v>
+                  <c:v>0.5850789636559806</c:v>
                 </c:pt>
                 <c:pt idx="3">
-                  <c:v>0.5548201147088411</c:v>
+                  <c:v>0.5389312748737204</c:v>
                 </c:pt>
               </c:numCache>
             </c:numRef>
@@ -4019,16 +4112,16 @@
                 <c:formatCode>0.00</c:formatCode>
                 <c:ptCount val="4"/>
                 <c:pt idx="0">
-                  <c:v>0.36790660103402084</c:v>
+                  <c:v>0.35802651767452975</c:v>
                 </c:pt>
                 <c:pt idx="1">
-                  <c:v>0.57892011716162</c:v>
+                  <c:v>0.5763639031854817</c:v>
                 </c:pt>
                 <c:pt idx="2">
-                  <c:v>0.6085112066188864</c:v>
+                  <c:v>0.5674949246776799</c:v>
                 </c:pt>
                 <c:pt idx="3">
-                  <c:v>0.5462524276328699</c:v>
+                  <c:v>0.5306136276231123</c:v>
                 </c:pt>
               </c:numCache>
             </c:numRef>
@@ -4219,13 +4312,13 @@
                 <c:formatCode>0.0"%"</c:formatCode>
                 <c:ptCount val="3"/>
                 <c:pt idx="0">
-                  <c:v>7.3596673596673545</c:v>
+                  <c:v>7.927927927927925</c:v>
                 </c:pt>
                 <c:pt idx="1">
-                  <c:v>24.696539988655697</c:v>
+                  <c:v>25.036868973340898</c:v>
                 </c:pt>
                 <c:pt idx="2">
-                  <c:v>34.649623373658976</c:v>
+                  <c:v>34.95777219812828</c:v>
                 </c:pt>
               </c:numCache>
             </c:numRef>
@@ -4494,7 +4587,7 @@
                 <c:formatCode>0.00</c:formatCode>
                 <c:ptCount val="2"/>
                 <c:pt idx="0">
-                  <c:v>0.6406120972110716</c:v>
+                  <c:v>0.6152918412949673</c:v>
                 </c:pt>
                 <c:pt idx="1">
                   <c:v>0.5768245170258804</c:v>
@@ -4568,7 +4661,7 @@
                 <c:formatCode>0.00</c:formatCode>
                 <c:ptCount val="2"/>
                 <c:pt idx="0">
-                  <c:v>0.44133987404915564</c:v>
+                  <c:v>0.4308196690748576</c:v>
                 </c:pt>
                 <c:pt idx="1">
                   <c:v>0.675383203051457</c:v>
@@ -4642,7 +4735,7 @@
                 <c:formatCode>0.00</c:formatCode>
                 <c:ptCount val="2"/>
                 <c:pt idx="0">
-                  <c:v>0.36790660103402084</c:v>
+                  <c:v>0.35802651767452975</c:v>
                 </c:pt>
                 <c:pt idx="1">
                   <c:v>0.7153385075515551</c:v>
@@ -5939,28 +6032,28 @@
                 <c:formatCode>0.0</c:formatCode>
                 <c:ptCount val="8"/>
                 <c:pt idx="0">
-                  <c:v>24.711287913673065</c:v>
+                  <c:v>27.01605405277283</c:v>
                 </c:pt>
                 <c:pt idx="1">
-                  <c:v>24.47014240510296</c:v>
+                  <c:v>24.701602481289342</c:v>
                 </c:pt>
                 <c:pt idx="2">
-                  <c:v>24.977129474402425</c:v>
+                  <c:v>26.251344039442394</c:v>
                 </c:pt>
                 <c:pt idx="3">
-                  <c:v>30.46350146167206</c:v>
+                  <c:v>30.76312271440047</c:v>
                 </c:pt>
                 <c:pt idx="4">
-                  <c:v>33.32605766567512</c:v>
+                  <c:v>31.4603651870902</c:v>
                 </c:pt>
                 <c:pt idx="5">
-                  <c:v>32.21373374657806</c:v>
+                  <c:v>31.642158834997282</c:v>
                 </c:pt>
                 <c:pt idx="6">
-                  <c:v>32.03389181457885</c:v>
+                  <c:v>30.815027022068588</c:v>
                 </c:pt>
                 <c:pt idx="7">
-                  <c:v>31.25108095480449</c:v>
+                  <c:v>31.270848453390776</c:v>
                 </c:pt>
               </c:numCache>
             </c:numRef>
@@ -6059,28 +6152,28 @@
                 <c:formatCode>0.0</c:formatCode>
                 <c:ptCount val="8"/>
                 <c:pt idx="0">
-                  <c:v>26.525999999999996</c:v>
+                  <c:v>31.256</c:v>
                 </c:pt>
                 <c:pt idx="1">
-                  <c:v>25.88300000000001</c:v>
+                  <c:v>29.607</c:v>
                 </c:pt>
                 <c:pt idx="2">
-                  <c:v>26.122</c:v>
+                  <c:v>30.126999999999995</c:v>
                 </c:pt>
                 <c:pt idx="3">
-                  <c:v>26.49000000000001</c:v>
+                  <c:v>32.68299999999999</c:v>
                 </c:pt>
                 <c:pt idx="4">
-                  <c:v>26.084000000000003</c:v>
+                  <c:v>31.845</c:v>
                 </c:pt>
                 <c:pt idx="5">
-                  <c:v>26.308000000000007</c:v>
+                  <c:v>32.92800000000001</c:v>
                 </c:pt>
                 <c:pt idx="6">
-                  <c:v>25.980000000000004</c:v>
+                  <c:v>32.794</c:v>
                 </c:pt>
                 <c:pt idx="7">
-                  <c:v>25.902</c:v>
+                  <c:v>32.096999999999994</c:v>
                 </c:pt>
               </c:numCache>
             </c:numRef>
@@ -7467,7 +7560,7 @@
           <a:lstStyle/>
           <a:p>
             <a:r>
-              <a:t>This update reports every benchmark result at the new standard record depth: each amplicon now keeps its 100 best hits, from an edlib shortlist of 500 candidates that is rescored in full; the previous deck used 20-hit records. Both real-ASV deployment runs (the KBase build and the weighting census) predate the standard and are labelled as 20-hit runs. The headline has not changed direction: on a controlled benchmark, where both methods share one reference set, one answer key and leave-genus-out folds, PICRUSt2 predicts EC content more accurately than prFBA, beyond the effect size fixed in advance. That leave-genus-out run is formally marked invalid by its gapfill phenotype gate (C12) until the template-direction fix is adopted; no EC number depends on that gate. New in this deck is a calibration of the per-function weight p(function): it ranks functions correctly but is overconfident, and thresholding it barely moves accuracy. Raising the record depth more than halved the self-exclusion abstention rate under the shipped exact-tie rule while leaving conditional quality roughly unchanged, so coverage and population figures remain lower bounds. Re-run at depth 100 under one selection rule, the three-panel comparison still shows conditional quality generalizing across panels while self-exclusion coverage does not.</a:t>
+              <a:t>This update reports every benchmark result at the new standard record depth: each amplicon now keeps its 100 best hits, from an edlib shortlist of 500 candidates that is rescored in full; the previous deck used 20-hit records. Both real-ASV deployment runs (the KBase build and the weighting census) predate the standard and are labelled as 20-hit runs. The headline has not changed direction: on a controlled benchmark, where both methods share one reference set, one answer key and leave-genus-out folds, PICRUSt2 predicts EC content more accurately than prFBA, beyond the effect size fixed in advance. Its gapfill phenotype gate (C12), which failed in the pre-registered run, passes under amendment A-C12 (corrected templates, post hoc and disclosed), so that leave-genus-out run is valid; no EC number changed. New in this deck is a calibration of the per-function weight p(function): it ranks functions correctly but is overconfident, and thresholding it barely moves accuracy. Raising the record depth more than halved the self-exclusion abstention rate under the shipped exact-tie rule while leaving conditional quality roughly unchanged, so coverage and population figures remain lower bounds. Re-run at depth 100 under one selection rule, the three-panel comparison still shows conditional quality generalizing across panels while self-exclusion coverage does not.</a:t>
             </a:r>
           </a:p>
         </p:txBody>
@@ -7537,7 +7630,7 @@
           <a:lstStyle/>
           <a:p>
             <a:r>
-              <a:t>Each pair of bars is how much a measure falls when the source organism is removed: genus accuracy in points (self-inclusion minus self-exclusion, among amplicons that answer) and gene capture (macro recall) in percentage points. Gene capture loses 25.9–26.5 points across the regions, while the genus loss is 24–25 points for full-length 16S and the two V1-anchored regions and 30–33 points for the 5 regions that start at V3 or later. V1–V2, the second-shortest region, generalizes like V1–V3, so the split is by where the amplicon starts, not by its length. In absolute terms, conditional genus accuracy with the source removed runs from 0.74 (full-length 16S) down to 0.60 (V4). Region therefore costs taxonomic resolution more than it costs raw functional recovery. Anchor predictor, Bacteria and Archaea pooled, legacy reducer, 100-hit records (manuscript fig:leakage); source taxacc_region_summary.json and gene_capture_by_region.json.</a:t>
+              <a:t>Each pair of bars is how much a measure falls when the source organism is removed: genus accuracy in points (self-inclusion minus self-exclusion, among amplicons that answer) and gene capture (macro recall) in percentage points. Gene capture loses 29.6–32.9 points across the regions, while the genus loss is 25–27 points for full-length 16S and the two V1-anchored regions and 31–32 points for the 5 regions that start at V3 or later. V1–V2, the second-shortest region, generalizes like V1–V3, so the split is by where the amplicon starts, not by its length. In absolute terms, conditional genus accuracy with the source removed runs from 0.73 (full-length 16S) down to 0.58 (V4). Region therefore costs taxonomic resolution more than it costs raw functional recovery. Anchor predictor, Bacteria and Archaea pooled, exact-tie union, 100-hit records (manuscript fig:leakage); source taxacc_region_summary.json and gene_capture_by_region.json.</a:t>
             </a:r>
           </a:p>
         </p:txBody>
@@ -7607,7 +7700,7 @@
           <a:lstStyle/>
           <a:p>
             <a:r>
-              <a:t>Self-exclusion accuracy has two denominators, and both count only amplicons the truth can score. Conditional accuracy (0.60–0.74 by region) divides correct genus calls by the amplicons that still resolve to a reference named at genus. Whole-population accuracy (0.40–0.56) divides by every genus-scoreable amplicon and counts two kinds of non-answer as misses: the 10.3% of genus-scoreable amplicons that receive no taxonomic call once their species-level relatives are removed (9.5% of all 67,991 amplicons), and a further 18.7% whose selected reference has no named genus, so genus coverage is 0.67–0.76 by region. Amplicons whose own truth has no named NCBI genus (22–25% by region, 15,965 pooled) are unscoreable and leave both denominators instead of counting as wrong. That exclusion is one of two scorer corrections, which moved the published generalization numbers in opposite directions: counting unscoreable ranks as prediction failures had made population accuracy pessimistic, and dropping abstentions from the gene-capture mean instead of scoring them zero had inflated capture. With abstentions scored zero, population gene capture is 60–68% against 69–73% among answered amplicons (10.7% of scoreable amplicons keep no genome). Both corrections came from re-deriving each metric from its own definition, and both are now unit-checked in the scorer. Figures: legacy reducer, 100-hit records, from asv_region_concordance.csv, benchmark_truth.json, taxacc_region_summary.json and gene_capture_by_region.json.</a:t>
+              <a:t>Self-exclusion accuracy has two denominators, and both count only amplicons the truth can score. Conditional accuracy (0.58–0.73 by region) divides correct genus calls by the amplicons that still resolve to a reference named at genus. Whole-population accuracy (0.37–0.54) divides by every genus-scoreable amplicon and counts two kinds of non-answer as misses: the 10.3% of genus-scoreable amplicons that receive no taxonomic call once their species-level relatives are removed (9.5% of all 67,991 amplicons), and a further 21.6% whose selected reference has no named genus, so genus coverage is 0.64–0.74 by region. Amplicons whose own truth has no named NCBI genus (22–25% by region, 15,965 pooled) are unscoreable and leave both denominators instead of counting as wrong. That exclusion is one of two scorer corrections, which moved the published generalization numbers in opposite directions: counting unscoreable ranks as prediction failures had made population accuracy pessimistic, and dropping abstentions from the gene-capture mean instead of scoring them zero had inflated capture. With abstentions scored zero, population gene capture is 58–64% against 66–70% among answered amplicons (9.7% of scoreable amplicons keep no genome). Both corrections came from re-deriving each metric from its own definition, and both are now unit-checked in the scorer. Figures: exact-tie union, 100-hit records, from asv_region_concordance.csv, benchmark_truth.json, taxacc_region_summary.json and gene_capture_by_region.json.</a:t>
             </a:r>
           </a:p>
         </p:txBody>
@@ -8097,7 +8190,7 @@
           <a:lstStyle/>
           <a:p>
             <a:r>
-              <a:t>Every arm is scored on the same 63,871 cells against the same answer key, with abstentions counted as zero. prFBA reaches population EC F1 0.687 against PICRUSt2's 0.779 (−0.092, 95% CI −0.107 to −0.081); forced to answer it reaches 0.747 and still trails by 0.031, so about two thirds of the deficit is abstention and the rest is in the answers. The bar the design registered is nn1, copying the single top-ranked surviving reference: forced prFBA only ties it (0.747 against 0.745, a margin with no paired test), the abstaining arm falls 0.058 below it, and PICRUSt2 clears it by 0.034. At leave-family-out the gap widens to −0.124 (forced −0.040) and prFBA's skill score falls to −0.14, a point estimate whose interval against the prevalence floor spans zero; clade-max is an oracle chosen against the truth, a ceiling and not a method to beat. These numbers do not depend on the as-shipped record depth: each fold ran its own alignment at k2 = 200, and 'prFBA' is the legacy rule that leave-one-fold-out selection picked in every fold (the shipped exact-tie rule scores 0.685). Validity: the include-self ceiling control C2 passes (prFBA source recovery 1.00, PICRUSt2 0.899 against a soft 0.85 flag; data_c2/summary_incself.json and data/controls.json), but the gapfill validity gate C12 fails, so the design's rule marks this leave-genus-out artefact invalid; no EC number changes, and the next three slides show why it fails and how the fix would clear it. Sources: shared_reference/data/summary_genus.json and data_family/summary_family.json.</a:t>
+              <a:t>Every arm is scored on the same 63,871 cells against the same answer key, with abstentions counted as zero. prFBA reaches population EC F1 0.687 against PICRUSt2's 0.779 (−0.092, 95% CI −0.107 to −0.081); forced to answer it reaches 0.747 and still trails by 0.031, so about two thirds of the deficit is abstention and the rest is in the answers. The bar the design registered is nn1, copying the single top-ranked surviving reference: forced prFBA only ties it (0.747 against 0.745, a margin with no paired test), the abstaining arm falls 0.058 below it, and PICRUSt2 clears it by 0.034. At leave-family-out the gap widens to −0.124 (forced −0.040) and prFBA's skill score falls to −0.14, a point estimate whose interval against the prevalence floor spans zero; clade-max is an oracle chosen against the truth, a ceiling and not a method to beat. These numbers do not depend on the as-shipped record depth: each fold ran its own alignment at k2 = 200, and 'prFBA' is the legacy rule that leave-one-fold-out selection picked in every fold (the shipped exact-tie rule scores 0.685). Validity: the include-self ceiling control C2 passes (prFBA source recovery 1.00, PICRUSt2 0.899 against a soft 0.85 flag; data_c2/summary_incself.json and data/controls.json), and the gapfill validity gate C12 passes under amendment A-C12 (post hoc and disclosed: corrected templates and the gapfiller's reversals), so the leave-genus-out artefact is valid; rescoring changed no EC number, and the next three slides show why C12 failed in the pre-registered run and how the fix cleared it. Sources: shared_reference/data/summary_genus.json and data_family/summary_family.json.</a:t>
             </a:r>
           </a:p>
         </p:txBody>
@@ -8167,7 +8260,7 @@
           <a:lstStyle/>
           <a:p>
             <a:r>
-              <a:t>Each arm's predicted EC set goes through one fixed ModelSEED reconstruction, and the model is asked on which of 54 media it can make ATP; only 22 ever carry signal, and the score is the number of media called wrong against the model built from the truth genome's own annotation (which, rebuilt, scores 0.00). Over the 755 ATP-informative genomes (prFBA answers all 1,000 assayed), where its EC-F1 gap to PICRUSt2 is only −0.028, prFBA calls 0.13 more media wrong than PICRUSt2 (Wilcoxon p = 0.49, BH q = 0.49): no detectable mean difference, a null and not an equivalence. Per medium, PICRUSt2 is ahead on 2 of 22 testable media (Ac.NO, Etho.O2; McNemar q = 0.002), and against copying the nearest reference prFBA calls 0.15 fewer media wrong (q = 0.028), the baseline it ties on ECs. PICRUSt2's drafts share more of the truth's reactions (median reaction Jaccard 0.737 against 0.707); on reaction Jaccard, essentiality and growth prFBA is indistinguishable from the nearest-reference baseline, and those readouts are unpaired medians with no paired test specified. The identity control C11 passes: one EC set built twice gives identical models. The validity gate C12 still fails its zero-tolerance leg: 5 of 200 gapfilled truth models (10 rows, one build shared by both pipelines) make ATP from water and protons, while its fraction leg passes (49 of 8,614 rows, 0.57% against a 10% ceiling); those genomes are dropped from every arm's gapfilled comparison, and the next two slides show the cause and a validated fix. The phenotype arm uses the shipped exact-tie rule on 1,000 pre-specified genomes (ATP) and a 200-genome gapfilled subsample; sources: shared_reference/data/phenotype_atp/ and phenotype_gf/phenotype_summary.json, data/controls.json.</a:t>
+              <a:t>Each arm's predicted EC set goes through one fixed ModelSEED reconstruction, and the model is asked on which of 54 media it can make ATP; only 22 ever carry signal, and the score is the number of media called wrong against the model built from the truth genome's own annotation (which, rebuilt, scores 0.00). Over the 755 ATP-informative genomes (prFBA answers all 1,000 assayed), where its EC-F1 gap to PICRUSt2 is only −0.028, prFBA calls 0.13 more media wrong than PICRUSt2 (Wilcoxon p = 0.49, BH q = 0.49): no detectable mean difference, a null and not an equivalence. Per medium, PICRUSt2 is ahead on 2 of 22 testable media (Ac.NO, Etho.O2; McNemar q = 0.002), and against copying the nearest reference prFBA calls 0.15 fewer media wrong (q = 0.028), the baseline it ties on ECs. PICRUSt2's drafts share more of the truth's reactions (median reaction Jaccard 0.737 against 0.707); on reaction Jaccard, essentiality and growth prFBA is indistinguishable from the nearest-reference baseline, and those readouts are unpaired medians with no paired test specified. The identity control C11 passes: one EC set built twice gives identical models. The validity gate C12 passes under amendment A-C12 (templates 21a8084 with the gapfiller's reversals applied, post hoc and disclosed): no gapfilled model of any arm makes ATP or biomass from water and protons (0 of 8,614 rows, against 49 in the pre-registered run, 10 of them truth rows), so every genome stays in every arm's gapfilled comparison; the ATP pass on the corrected templates reproduced the pre-registered pass row for row, so the ATP numbers here are unchanged, and the next two slides show the pre-registered failure's cause and the fix. The phenotype arm uses the shipped exact-tie rule on 1,000 pre-specified genomes (ATP) and a 200-genome gapfilled subsample; sources: shared_reference/data/phenotype_atp_c12fix/ and phenotype_gf_c12fix/phenotype_summary.json, data/controls.json.</a:t>
             </a:r>
           </a:p>
         </p:txBody>
@@ -8377,7 +8470,7 @@
           <a:lstStyle/>
           <a:p>
             <a:r>
-              <a:t>The fix restricts five template reactions to their physiological direction (rxn00006, rxn10966, rxn00381, rxn00084, rxn08167; ModelSEEDTemplates 21a8084) and applies the reversals the gapfiller proposes, which the pipeline's ModelSEEDpy fork drops. Rebuilt from the patched template files over all 218 gapfilled models of the 20 affected genomes, it takes the leaking models from 44 to 0 with 0 new leaks; every model grows (0 non-growers, against 10 as shipped, all of them dropped reversals), and the models that already passed keep their growth (median ratio 1.000 against the original templates with reversals applied). Adopting it changes pre-registered pipeline settings, so it needs a SPEC amendment that records it was decided after C12 failed, and both phenotype passes must be re-run on one template version: the ATP pass (1,000 genomes, 44,348 models, no gapfilling, about 2–3 h), because the change also alters its un-gapfilled drafts, and the gapfilled pass (200 genomes, 8,614 models, about 4–6 h), then the C11 identity control and the fold rescoring. C12 should then pass, since all 10 gated truth rows sit in the validated genomes, and the leave-genus-out artefact becomes valid if every other hard control holds, with its EC numbers unchanged (0.687 against 0.779). The phenotype readouts move: small shifts in the ATP readout through the drafts, larger ones in the gapfilled readouts as the 20 genomes return to every arm's denominator and growth counts the reversals; the headline null is unlikely to flip but must be re-checked. The risk is the other 180 gapfilled genomes, which were not part of the validation: a new leak there would leave C12 failing. Sources: region_validation/shared_reference/C12_FIX_PLAN.md and data/template_direction_audit/validation_summary.json (entries baseline, base+rev and PR1v2+rev).</a:t>
+              <a:t>The fix restricts five template reactions to their physiological direction (rxn00006, rxn10966, rxn00381, rxn00084, rxn08167; ModelSEEDTemplates 21a8084) and applies the reversals the gapfiller proposes, which the pipeline's ModelSEEDpy fork drops. Rebuilt from the patched template files over all 218 gapfilled models of the 20 affected genomes, it takes the leaking models from 44 to 0 with 0 new leaks; every model grows (0 non-growers, against 10 as shipped, all of them dropped reversals), and the models that already passed keep their growth (median ratio 1.000 against the original templates with reversals applied). The amendment has since run (SPEC section 14, with ModelSEEDpy pinned to the commit the pre-registered run used, after the first launch was found importing a moved editable install). The ATP pass on the corrected templates reproduced the pre-registered pass row for row, so its readouts did not move. The gapfilled pass gated 0 of 8,614 rows against 49, with 0 new leaks in all 200 genomes, the 180 outside the validation included, and 0 non-growing models against 136; rescored, C11 and C12 pass and the leave-genus-out artefact is valid, with every EC number unchanged (0.687 against 0.779). Sources: region_validation/shared_reference/C12_FIX_PLAN.md, C12_SCOPE.md and data/template_direction_audit/validation_summary.json (entries baseline, base+rev and PR1v2+rev).</a:t>
             </a:r>
           </a:p>
         </p:txBody>
@@ -8447,7 +8540,7 @@
           <a:lstStyle/>
           <a:p>
             <a:r>
-              <a:t>We compared every reaction direction in the v7.0 ModelSEED templates with the ModelSEED database: 41 reactions per genome-scale template are allowed only in the direction the database forbids, and 1,192–1,196 differ from it once the reactions the templates leave reversible are counted. Read one by one against known physiology, only 5 of the 41 are template errors; for 24 the database direction is the wrong one, 8 are reversible or near equilibrium, 2 are mis-specified reactions to remove or block, and 2 are unresolved. The curated set is the five-reaction fix that closes the C12 leaks (rxn00006, rxn10966, rxn00381, rxn00084, rxn08167), the 5 template errors, and an optional reverse-penalty sign clean-up, 10 direction changes in all against 1,192–1,196 per template for the database-aligned set; on the 218 gapfilled models of the 20 affected genomes it removes all 44 leaks with no new one, every model grows, the median growth ratio is 1.000, and 18–19 of the 174 passing models move by more than 10% because the gapfill MILP lands on another near-equal optimum. Applying the database directions wholesale also closes every leak, but archaeon 2837493.4 then has no gapfill solution, so all 11 of its models stop growing (2 of the 44 leaking models count as fixed only because gapfilling failed); the models that still grow keep a median 0.808 of their growth (0.752 counting the non-growers as zero), and 103 of 174 move by more than 10%. So the database directions must not be applied wholesale; the 24 database errors and 8 near-equilibrium entries go to ModelSEEDDatabase as an issue instead. The branches and the PR and issue texts are ready (region_validation/shared_reference/SUBMIT_ModelSEEDTemplates.md), but the branches are still local in ~/Documents/ModelSEEDTemplates: the GitHub access used for this work covers only the prFBA repository, so the push and the submission to ModelSEED are pending. Sources: data/template_direction_audit/tierB_readings.tsv, direction_audit.tsv, validation_per_model.csv and validation_summary.json (entries PR1v2+rev, Bcur2+rev, PENcur2+rev, BC_full+rev, base+rev).</a:t>
+              <a:t>We compared every reaction direction in the v7.0 ModelSEED templates with the ModelSEED database: 41 reactions per genome-scale template are allowed only in the direction the database forbids, and 1,192–1,196 differ from it once the reactions the templates leave reversible are counted. Read one by one against known physiology, only 5 of the 41 are template errors; for 24 the database direction is the wrong one, 8 are reversible or near equilibrium, 2 are mis-specified reactions to remove or block, and 2 are unresolved. The curated set is the five-reaction fix that closes the C12 leaks (rxn00006, rxn10966, rxn00381, rxn00084, rxn08167), the 5 template errors, and an optional reverse-penalty sign clean-up, 10 direction changes in all against 1,192–1,196 per template for the database-aligned set; on the 218 gapfilled models of the 20 affected genomes it removes all 44 leaks with no new one, every model grows, the median growth ratio is 1.000, and 18–19 of the 174 passing models move by more than 10% because the gapfill MILP lands on another near-equal optimum. Applying the database directions wholesale also closes every leak, but archaeon 2837493.4 then has no gapfill solution, so all 11 of its models stop growing (2 of the 44 leaking models count as fixed only because gapfilling failed); the models that still grow keep a median 0.808 of their growth (0.752 counting the non-growers as zero), and 103 of 174 move by more than 10%. So the database directions must not be applied wholesale; the 24 database errors and 8 near-equilibrium entries go to ModelSEEDDatabase as an issue instead. The branches are pushed to freiburgermsu/ModelSEEDTemplates, and the pull requests and the audit issue (ModelSEED/ModelSEEDTemplates#10) were filed on 2026-10-27 from the texts in region_validation/shared_reference/ (SUBMIT_ModelSEEDTemplates.md). Sources: data/template_direction_audit/tierB_readings.tsv, direction_audit.tsv, validation_per_model.csv and validation_summary.json (entries PR1v2+rev, Bcur2+rev, PENcur2+rev, BC_full+rev, base+rev).</a:t>
             </a:r>
           </a:p>
         </p:txBody>
@@ -8587,7 +8680,7 @@
           <a:lstStyle/>
           <a:p>
             <a:r>
-              <a:t>Depth 100 makes the choice of selection rule matter. The shipped exact-tie union keeps every reference tied at the best identity, so among the self-inclusion amplicons whose source genome is in the 100-hit record it keeps the source in 99.1% (66,840 of 67,466); the earlier ordered (legacy) reducer keeps it in 81.3% and discards it in 12,602. The price shows when the source is present: the union grows to 2.88 genomes per answer against 1.32, and V4 gene-capture precision falls to 0.795 against 0.856. On the as-shipped PICRUSt2 axis the population EC F1 gap is −0.016 under the union (95% genome-clustered bootstrap CI −0.021 to −0.011, significant) and −0.002 under the legacy reducer (CI −0.007 to +0.003, not significant). In the controlled shared-reference benchmark, leave-one-fold-out selection picked legacy over the exact-tie union in 10 of 10 folds (genus and family holdouts), by 0.001 to 0.003 F1, an order of magnitude below the pre-registered 0.02 smallest effect of interest; the genus summary marks itself invalid because the C12 gapfill validity gate failed, which does not touch these EC fold scores. The manuscript currently uses each rule where it is like for like: tab:main, McNemar, MAG against 16S and every cross-panel number use the legacy reducer, while the as-shipped PICRUSt2 comparison and the abstention decomposition use the union. The lean is union throughout, because it is the rule users run, it keeps the source when the source is there, and legacy's edge in the controlled benchmark is far below the smallest effect of interest; its cost is the larger self-inclusion union and lower short-amplicon precision, and it remains a proposal until the rule is chosen. Sources: taxacc_region_summary.json and gene_capture_by_region.json in region_validation_d100 and region_validation_d100_legacy; gene_capture_cells.csv (n_selected); comparison_summary.json and D100_VS_D20.md section 2D; shared_reference summary_genus.json and summary_family.json (nested_cv).</a:t>
+              <a:t>Depth 100 makes the choice of selection rule matter. The shipped exact-tie union keeps every reference tied at the best identity, so among the self-inclusion amplicons whose source genome is in the 100-hit record it keeps the source in 99.1% (66,840 of 67,466); the earlier ordered (legacy) reducer keeps it in 81.3% and discards it in 12,602. The price shows when the source is present: the union grows to 2.88 genomes per answer against 1.32, and V4 gene-capture precision falls to 0.795 against 0.856. On the as-shipped PICRUSt2 axis the population EC F1 gap is −0.016 under the union (95% genome-clustered bootstrap CI −0.021 to −0.011, significant) and −0.002 under the legacy reducer (CI −0.007 to +0.003, not significant). In the controlled shared-reference benchmark, leave-one-fold-out selection picked legacy over the exact-tie union in 10 of 10 folds (genus and family holdouts), by 0.001 to 0.003 F1, an order of magnitude below the pre-registered 0.02 smallest effect of interest; the genus summary marks itself invalid because the C12 gapfill validity gate failed, which does not touch these EC fold scores. On 2026-10-27 the authors chose the union for the whole paper, because it is the rule users run, it keeps the source when the source is there, and legacy's edge in the controlled benchmark is far below the smallest effect of interest; its cost is the larger self-inclusion union and lower short-amplicon precision. Until then the manuscript used each rule where it was like for like (legacy for tab:main, McNemar, MAG against 16S and the cross-panel numbers). The legacy reducer stays an option users can select, and the controlled benchmark keeps its pre-registered arm, which leave-one-fold-out selection set to legacy, beside the exact-tie arm. Sources: taxacc_region_summary.json and gene_capture_by_region.json in region_validation_d100 and region_validation_d100_legacy; gene_capture_cells.csv (n_selected); comparison_summary.json and D100_VS_D20.md section 2D; shared_reference summary_genus.json and summary_family.json (nested_cv).</a:t>
             </a:r>
           </a:p>
         </p:txBody>
@@ -8867,7 +8960,7 @@
           <a:lstStyle/>
           <a:p>
             <a:r>
-              <a:t>Paired within organism against the amplicon arm's own cells (depth-100 records, legacy reducer, as in tab:main), the MAG arm leads full-length 16S by +0.122 in gene-capture F1 at full completeness and still by +0.096 at 1%, fifty-fold below MIMAG's medium-quality floor and not a bin any study would keep; against V4 the lead is +0.192 and +0.169. At 1% the MAG arm still wins 1,240 organisms to 373 against full-length 16S, and every one of the 28 paired tests has Wilcoxon p ≤ 3e-121. Across all 8 regions at full completeness the lead follows the variable region, not amplicon length: +0.105 to +0.122 against full-length 16S and the two V1-anchored regions, +0.167 to +0.192 against the five that start at V3 or later, with V4 the widest gap. The reason is structural: the prediction is the gene content of the selected reference genome, not of the MAG, so completeness matters only if it changes which reference is chosen, and ANI is robust enough that it rarely does. What degrades is coverage, not quality: the resolve rate falls from 0.308 to 0.253 as the remaining sequence stops clearing skani's screen, while conditional F1 drops by only 0.024. All of this is conditional on both arms answering; over the whole population, scoring an abstention as zero, the amplicon arm wins, 0.594 against 0.248 for full-length 16S, because the MAG arm answers for only about 31% of organisms (see the abstention slide).</a:t>
+              <a:t>Paired within organism against the amplicon arm's own cells (depth-100 records, exact-tie union, as in tab:main), the MAG arm leads full-length 16S by +0.103 in gene-capture F1 at full completeness and still by +0.077 at 1%, fifty-fold below MIMAG's medium-quality floor and not a bin any study would keep; against V4 the lead is +0.212 and +0.190. At 1% the MAG arm still wins 1,129 organisms to 473 against full-length 16S, and every one of the 28 paired tests has Wilcoxon p ≤ 1e-79. Across all 8 regions at full completeness the lead follows the variable region, not amplicon length: +0.103 to +0.116 against full-length 16S and the two V1-anchored regions, +0.168 to +0.212 against the five that start at V3 or later, with V4 the widest gap. The reason is structural: the prediction is the gene content of the selected reference genome, not of the MAG, so completeness matters only if it changes which reference is chosen, and ANI is robust enough that it rarely does. What degrades is coverage, not quality: the resolve rate falls from 0.308 to 0.253 as the remaining sequence stops clearing skani's screen, while conditional F1 drops by only 0.024. All of this is conditional on both arms answering; over the whole population, scoring an abstention as zero, the amplicon arm wins, 0.605 against 0.248 for full-length 16S, because the MAG arm answers for only about 31% of organisms (see the abstention slide).</a:t>
             </a:r>
           </a:p>
         </p:txBody>
@@ -8937,7 +9030,7 @@
           <a:lstStyle/>
           <a:p>
             <a:r>
-              <a:t>At full completeness the MAG arm's resolve rate is 0.308, and the cause of the abstentions is marker reach rather than MAG quality: among the 6,011 organisms that do have a same-genus congener in the panel, the best surviving hit aligns over a median of only 20.3% of the query, and 45.1% fall under the 15% AF gate. An amplicon aligns end to end by construction, so in the 0.945–0.987 16S-identity band the amplicon arm answers 98.6% of the time (depth-100 records, legacy reducer) where whole-genome ANI answers 8–20%. Counterfactually the ANI floor is almost irrelevant and the AF gate is almost everything: dropping the floor from 83 to 0 moves the share with a qualifying surviving hit from 0.311 to 0.316, while relaxing the gate from 15% to 2% moves it to 0.452; the resolve rate after selection is 0.308. The gate is nonetheless the method working: the 1,367 organisms a 2% gate would newly answer carry a mean gene-capture F1 of 0.599 against 0.807 for those already answered, and only 31.8% of them exceed the full-length 16S level of 0.691, so relaxing it would buy 45% more coverage while pulling the pooled F1 down to 0.742. Reference density also matters: against GTDB r226, about 14-fold denser, the same pipeline resolves 0.556 of a 2,000-organism subsample, with completeness-invariance intact. Retention depth, the dominant cause of the amplicon arm's self-exclusion abstentions, plays almost no part: only 93 of the 49,985 uncontaminated records (0.19%; 156 of 99,970 counting the contaminated grid) were both capped at 100 hits and emptied by exclusion, and re-searching 447 capped queries and 200 controls at depth 2,000 changed 11 selections, every one from abstention to an answer.</a:t>
+              <a:t>At full completeness the MAG arm's resolve rate is 0.308, and the cause of the abstentions is marker reach rather than MAG quality: among the 6,011 organisms that do have a same-genus congener in the panel, the best surviving hit aligns over a median of only 20.3% of the query, and 45.1% fall under the 15% AF gate. An amplicon aligns end to end by construction, so in the 0.945–0.987 16S-identity band the amplicon arm answers 98.2% of the time (depth-100 records, exact-tie union) where whole-genome ANI answers 8–20%. Counterfactually the ANI floor is almost irrelevant and the AF gate is almost everything: dropping the floor from 83 to 0 moves the share with a qualifying surviving hit from 0.311 to 0.316, while relaxing the gate from 15% to 2% moves it to 0.452; the resolve rate after selection is 0.308. The gate is nonetheless the method working: the 1,367 organisms a 2% gate would newly answer carry a mean gene-capture F1 of 0.599 against 0.807 for those already answered, and only 26.7% of them exceed the full-length 16S level of 0.710, so relaxing it would buy 45% more coverage while pulling the pooled F1 down to 0.742. Reference density also matters: against GTDB r226, about 14-fold denser, the same pipeline resolves 0.556 of a 2,000-organism subsample, with completeness-invariance intact. Retention depth, the dominant cause of the amplicon arm's self-exclusion abstentions, plays almost no part: only 93 of the 49,985 uncontaminated records (0.19%; 156 of 99,970 counting the contaminated grid) were both capped at 100 hits and emptied by exclusion, and re-searching 447 capped queries and 200 controls at depth 2,000 changed 11 selections, every one from abstention to an answer.</a:t>
             </a:r>
           </a:p>
         </p:txBody>
@@ -9287,7 +9380,7 @@
           <a:lstStyle/>
           <a:p>
             <a:r>
-              <a:t>Every rate here is phylum-standardized over the 113 phyla present in all three panels, restricted to organisms with a full-length best 16S, under self-exclusion at τ = 0.987, with all three panels scored at record depth 100 under the legacy reducer; intervals are 1,000 phylum-stratified bootstrap replicates. The chart shows V4: genus coverage is 0.641, 0.441 and 0.368 on the stratified, k-means and random panels, a random-minus-stratified difference of −0.273 (−0.289 to −0.254) against −0.342 crude. In every region, genus and gene-capture coverage fall by 0.22 to 0.29 on the random panel, every interval excludes zero, and the standardized gap keeps 76–94% of the crude one, so composition is a minority of it. Quality given an answer moves far less. Conditional genus accuracy is higher on both alternative panels than on the stratified one in every region, by up to 0.07 (random minus stratified excludes zero in 5 of 8 regions). Conditional family accuracy differs by at most 0.04 between any two panels, and conditional gene-capture F1 by at most 0.027: it is lower on the random panel by 0.014 to 0.027, an order of magnitude below the coverage gap; the MAG arm, scored against each panel as its own reference, stays within the same bound.</a:t>
+              <a:t>Every rate here is phylum-standardized over the 113 phyla present in all three panels, restricted to organisms with a full-length best 16S, under self-exclusion at τ = 0.987, with all three panels scored at record depth 100 under the exact-tie union; intervals are 1,000 phylum-stratified bootstrap replicates. The chart shows V4: genus coverage is 0.615, 0.431 and 0.358 on the stratified, k-means and random panels, a random-minus-stratified difference of −0.257 (−0.276 to −0.239) against −0.330 crude. In every region, genus and gene-capture coverage fall by 0.20 to 0.29 on the random panel, every interval excludes zero, and the standardized gap keeps 76–92% of the crude one, so composition is a minority of it. Quality given an answer moves far less. Conditional genus accuracy is higher on both alternative panels than on the stratified one in every region, by up to 0.07 (random minus stratified excludes zero in 2 of 8 regions). Conditional family accuracy differs by at most 0.05 between any two panels, and conditional gene-capture F1 by at most 0.028: it is lower on the random panel by 0.013 to 0.028, an order of magnitude below the coverage gap; the MAG arm, scored against each panel as its own reference, stays within the same bound.</a:t>
             </a:r>
           </a:p>
         </p:txBody>
@@ -9357,7 +9450,7 @@
           <a:lstStyle/>
           <a:p>
             <a:r>
-              <a:t>On full-length 16S under self-exclusion at τ = 0.987, with all three panels scored at record depth 100 under the legacy reducer, self-exclusion deletes all 100 retained hits for 4.7% of stratified-panel queries, 22.9% of k-means and 33.4% of random. Where the record survives, only 2.8%, 2.3% and 1.9% go uncovered; where it is emptied, every query goes uncovered by construction, with no evidence either way about rank 101. Uncovered is one minus crude gene-capture coverage, which on these trees is the abstentions alone: no cell on any panel selects a reference without gene families. So the cross-panel coverage difference is, to within a point and a half, the difference in how often the record empties: 1 − 0.334 = 0.666 against 0.654; 1 − 0.229 = 0.771 against 0.753; 1 − 0.047 = 0.953 against 0.926. The surviving-record rates run opposite to the coverage gap, the best-covered stratified panel leaving the most survivors uncovered (Cochran-Mantel-Haenszel p = 0.018 stratified against random, 0.28 against k-means). Self-inclusion is panel-dependent for a related reason: the source genome is among its amplicon's 100 retained hits for 99.1% of amplicons on the stratified panel but 73.9% and 68.0% on the k-means and random panels. The misses are exact ties filling the whole record (0.9%, 8.2% and 15.1% of amplicons) or the source's sequence credited to another genome by the index, which keeps one genome per distinct sequence (0.0%, 18.0% and 16.9%). A miss still finds an exact-identity relative, but a different genome, so self-inclusion on a database-representative panel mixes true self-recovery with recovery of a 16S-identical neighbour.</a:t>
+              <a:t>On full-length 16S under self-exclusion at τ = 0.987, with all three panels scored at record depth 100 under the exact-tie union, self-exclusion deletes all 100 retained hits for 4.7% of stratified-panel queries, 22.9% of k-means and 33.4% of random. Where the record survives, only 3.4%, 2.8% and 2.4% go uncovered; where it is emptied, every query goes uncovered by construction, with no evidence either way about rank 101. Uncovered is one minus crude gene-capture coverage, which on these trees is the abstentions alone: only 2,073 cells on any panel selects a reference without gene families. So the cross-panel coverage difference is, to within a point and a half, the difference in how often the record empties: 1 − 0.334 = 0.666 against 0.650; 1 − 0.229 = 0.771 against 0.750; 1 − 0.047 = 0.953 against 0.921. The surviving-record rates run opposite to the coverage gap, the best-covered stratified panel leaving the most survivors uncovered (Cochran-Mantel-Haenszel p = 0.004 stratified against random, 0.15 against k-means). Self-inclusion is panel-dependent for a related reason: the source genome is among its amplicon's 100 retained hits for 99.1% of amplicons on the stratified panel but 73.9% and 68.0% on the k-means and random panels. The misses are exact ties filling the whole record (0.9%, 8.2% and 15.1% of amplicons) or the source's sequence credited to another genome by the index, which keeps one genome per distinct sequence (0.0%, 18.0% and 16.9%). A miss still finds an exact-identity relative, but a different genome, so self-inclusion on a database-representative panel mixes true self-recovery with recovery of a 16S-identical neighbour.</a:t>
             </a:r>
           </a:p>
         </p:txBody>
@@ -9427,7 +9520,7 @@
           <a:lstStyle/>
           <a:p>
             <a:r>
-              <a:t>The GTDB arm settles whether the amplicon coverage gap reflects the organisms or the record. It searches synthetic MAGs of an approximately 20% phylum-proportional subsample of each panel (2,000, 1,995 and 1,989 scored organisms) against the 143,614 species-representative genomes of GTDB r226, excluding the source species at ANI 95, with a record 100 hits deep, as deep as the amplicon record. Species exclusion empties a depth-capped GTDB record for under 1% of MAGs (0.6%, 0.6% and 0.7%), against 4.7%, 22.9% and 33.4% of full-length 16S queries. With identity measured over the genome, the alternative panels resolve more novel organisms, not fewer: 0.715 and 0.675 against 0.577 at full completeness, standardized over the 68 shared phyla, a random-minus-stratified difference of +0.139 (+0.108 to +0.171) that stays between +0.135 and +0.145 at every completeness down to 30%. The median best surviving relative sits at 92.1 and 91.4 ANI for the random and k-means panels against 89.5 for the stratified one: organisms drawn in proportion to the database come from well-sampled clades, while the stratified panel reaches into sparse ones. What this licenses: the headline self-exclusion coverage is a property of the stratified panel at record depth 100, a lower bound whose tightness depends on the panel, and the claim that replicates on all three panels is the conditional one: standardized conditional gene-capture F1 differs by at most 0.027 between any two panels in either arm.</a:t>
+              <a:t>The GTDB arm settles whether the amplicon coverage gap reflects the organisms or the record. It searches synthetic MAGs of an approximately 20% phylum-proportional subsample of each panel (2,000, 1,995 and 1,989 scored organisms) against the 143,614 species-representative genomes of GTDB r226, excluding the source species at ANI 95, with a record 100 hits deep, as deep as the amplicon record. Species exclusion empties a depth-capped GTDB record for under 1% of MAGs (0.6%, 0.6% and 0.7%), against 4.7%, 22.9% and 33.4% of full-length 16S queries. With identity measured over the genome, the alternative panels resolve more novel organisms, not fewer: 0.715 and 0.675 against 0.577 at full completeness, standardized over the 68 shared phyla, a random-minus-stratified difference of +0.139 (+0.108 to +0.171) that stays between +0.135 and +0.145 at every completeness down to 30%. The median best surviving relative sits at 92.1 and 91.4 ANI for the random and k-means panels against 89.5 for the stratified one: organisms drawn in proportion to the database come from well-sampled clades, while the stratified panel reaches into sparse ones. What this licenses: the headline self-exclusion coverage is a property of the stratified panel at record depth 100, a lower bound whose tightness depends on the panel, and the claim that replicates on all three panels is the conditional one: standardized conditional gene-capture F1 differs by at most 0.028 between any two panels in either arm.</a:t>
             </a:r>
           </a:p>
         </p:txBody>
@@ -9497,7 +9590,7 @@
           <a:lstStyle/>
           <a:p>
             <a:r>
-              <a:t>Since the last deck, the depth-100 rerun and everything built on it went through adversarial checks that re-derive each claim from the primary files. The report comparing the depth-100 rerun with the earlier results (region_validation_d100/D100_VS_D20.md) was checked claim by claim by independent verifiers: 85 of 91 claims confirmed, with the corrections listed in its section 5. The manuscript's depth-100 revision went through three verification rounds, with 67, 32 and 4 findings, every one applied. The ModelSEED template PR texts went through 3 rounds of review; one caught that the first fix set NadX to the database's reverse direction, which blocks the first step of NAD synthesis in organisms without NadB, so the fix became five reactions with L-aspartate oxidase (rxn08167) restricted forward. Faults caught on the way: the ModelSEEDpy fork's MSBuilder.build_and_gapfill drops the gapfiller's reversals (the C12 fix run will apply them in prFBA's own gapfill step; the fork itself still needs the fix); four manuscript figures were still the earlier renders under the revised captions and were re-rendered. Two stay open: the legacy reducer's two scoring passes disagree on self-exclusion abstentions (6,482 in score_taxacc's estimator path against 7,344 in the gene-capture selection), and in 23–33 full-length rows per k-means and random tree the cells' source taxon differs from the truth file's, an effect of at most 0.06 points on the emptied share. Earlier audits checked 595 manuscript claims (161 defects corrected) and 598 deck claims plus 377 over the fixes (54 and 14 defects), all fixed, and our own runs caught 4 pipeline faults before that.</a:t>
+              <a:t>Since the last deck, the depth-100 rerun and everything built on it went through adversarial checks that re-derive each claim from the primary files. The report comparing the depth-100 rerun with the earlier results (region_validation_d100/D100_VS_D20.md) was checked claim by claim by independent verifiers: 85 of 91 claims confirmed, with the corrections listed in its section 5. The manuscript's depth-100 revision went through three verification rounds, with 67, 32 and 4 findings, every one applied; a fourth re-derived every number the switch to the exact-tie union changed or added, about 580, found none wrong, and found 9 text and figure defects, all fixed (region_validation_d100/UNION_VERIFICATION.md). The ModelSEED template PR texts went through 3 rounds of review; one caught that the first fix set NadX to the database's reverse direction, which blocks the first step of NAD synthesis in organisms without NadB, so the fix became five reactions with L-aspartate oxidase (rxn08167) restricted forward. Faults caught on the way: the ModelSEEDpy fork's MSBuilder.build_and_gapfill drops the gapfiller's reversals (amendment A-C12 applies them in prFBA's own gapfill step; the fork itself still needs the fix); the editable ModelSEEDpy install moved under the first A-C12 launch (another session's commits change ATP correction and demand reactions), so both passes were rerun pinned to the pre-registered commit, which reproduces every stored row; four manuscript figures were still the earlier renders under the revised captions and were re-rendered. Two stay open: the legacy reducer's two scoring passes disagree on self-exclusion abstentions (6,482 in score_taxacc's estimator path against 7,344 in the gene-capture selection), and in 23–33 full-length rows per k-means and random tree the cells' source taxon differs from the truth file's, an effect of at most 0.06 points on the emptied share. Earlier audits checked 595 manuscript claims (161 defects corrected) and 598 deck claims plus 377 over the fixes (54 and 14 defects), all fixed, and our own runs caught 4 pipeline faults before that.</a:t>
             </a:r>
           </a:p>
         </p:txBody>
@@ -9567,7 +9660,7 @@
           <a:lstStyle/>
           <a:p>
             <a:r>
-              <a:t>Four decisions need the authors. First, the C12 fix: adopting the validated five-reaction template fix and applying the gapfiller's reversals changes pre-registered settings, so it needs a SPEC amendment and a re-run of both phenotype passes, the ATP pass included, because the template change also alters its drafts (region_validation/shared_reference/C12_FIX_PLAN.md); it should make C12 pass and the leave-genus-out artefact valid, with its EC numbers unchanged. Second, one selection rule for the paper: the manuscript now uses the legacy reducer for tab:main, McNemar, MAG-versus-16S and every cross-panel number, and the shipped exact-tie union for the as-shipped PICRUSt2 comparison and the retention-depth decomposition. Third, the GTDB accession map is built but not wired in; with it a GTDB hit yields gene content, so the genome-scale arm runs end to end against the dense reference. Fourth, the ModelSEED template PRs and the direction-audit issue are written and reviewed but not yet submitted. Next: push the revised manuscript branch, re-run the real-amplicon deployment at record depth 100 (it still uses the earlier depth and is labelled so in the paper), resolve the two open inconsistencies on the audit slide, and close the loop to flux by propagating probability-weighted genomes through community prFBA and validating against paired metagenomes. Two items from the last deck are done: retention depth is now 100, and the weighting has been tested by calibration.</a:t>
+              <a:t>Four decisions are made. First, one selection rule: the exact-tie union is used throughout the paper and the deck; the legacy (ordered) reducer stays a user option and appears only in the labelled depth-20 versus depth-100 comparisons. Second, the GTDB accession map is built but deferred to future work, because wiring it in changes which genomes a GTDB hit selects. Third, the ModelSEED template pull requests and the direction-audit issue (ModelSEED/ModelSEEDTemplates#10) were filed on 2026-10-27. Fourth, the C12 fix was adopted as SPEC amendment A-C12, post hoc and disclosed: templates 21a8084 plus the gapfiller's reversals, with both phenotype passes rerun on ModelSEEDpy pinned to the pre-registered commit; C12 passes on the rerun (0 gated truth rows, 0 of 8,614 rows gated), so the leave-genus-out artefact is valid under the amendment. Next: push the revised manuscript branch, re-run the real-amplicon deployment at record depth 100 (it still uses the earlier depth and is labelled so in the paper), resolve the two open faults on the audit slide, and close the loop to flux by propagating probability-weighted genomes through community prFBA and validating against paired metagenomes.</a:t>
             </a:r>
           </a:p>
         </p:txBody>
@@ -9637,7 +9730,7 @@
           <a:lstStyle/>
           <a:p>
             <a:r>
-              <a:t>Stage 1 scans all 459,301 unique references with edlib in infix mode and keeps the 500 closest per amplicon; it runs identically on every machine and took 70% of the 6.9 h that the depth-100 run needed for 60,461 unique amplicons. Stage 2 scores the shortlist with the GPU Smith-Waterman kernel, which on an exhaustive sweep reached 57.3 GCUPS on one RTX 5070 Ti, 7.8 times a 60-process Biopython CPU baseline, and is bit-exact to Biopython on 400/400 control pairs. Stage 3 re-aligns candidates with Biopython to recover identity and coverage. The standard setting re-aligns the GPU's best 200, taken in the rescore's own order (score, then edit distance, then reference index), and keeps 100; the GPU score is bit-exact to Biopython's on every hit of the depth-100 records, so that pick always contains the record, and re-aligning 200 instead of all 500, as the depth-100 run did, reproduces all 60,461 of its records exactly while shortening the Biopython stage by about 19%. Biopython is still needed because the GPU kernel is score-only: the alignment itself gives identity, aligned length and coordinates, at about 25 ms per traceback against 2.4 ms per re-score, so the 100 tracebacks per record, not the re-scoring, are most of the Biopython stage's 29% of the depth-100 run's wall time. Retrieval is exact rather than approximate because a nucleotide-transformer embedding put the true best hit first only 50.5% of the time, against 75.5% for a k-mer retriever, and random 16S pairs already average cosine 0.90. The CUDA kernel is now the standalone gpusw package, reusable outside this project.</a:t>
+              <a:t>Stage 1 scans all 459,301 unique references with edlib in infix mode and keeps the 500 closest per amplicon; it runs identically on every machine and took 70% of the 6.9 h that the depth-100 run needed for 60,461 unique amplicons. Stage 2 scores the shortlist with the GPU Smith-Waterman kernel, which on an exhaustive sweep reached 57.3 GCUPS on one RTX 5070 Ti, 7.8 times a 60-process Biopython CPU baseline, and is bit-exact to Biopython on 400/400 control pairs. Stage 3 re-aligns candidates with Biopython to recover identity and coverage. Since 2026-10-27 nothing is re-scored: the GPU score is bit-exact to Biopython's on all 6,046,100 hits of the depth-100 records, so the GPU ranks the shortlist, under the order the re-score itself used (score, then edit distance, then reference index), and Biopython only aligns the top 100, because the score-only kernel cannot give identity, aligned length or coordinates. Each alignment's score is checked against the GPU's, with a re-score of the best 200 as the fallback. Ranked this way the stage reproduces all 60,461 records of the depth-100 run byte for byte, with no fallback, in 3,425 s instead of 7,128 s on 40 workers: that run re-scored all 500 candidates (about 4.3 ms each) before aligning 100 (about 16 ms each), which made the Biopython stage 29% of its wall time; about three fifths of that stage's growth from depth 20 was the re-score. Summed over its stages, the pipeline as it runs now takes about 5.9 h for these amplicons, against 6.9 h. Retrieval is exact rather than approximate because a nucleotide-transformer embedding put the true best hit first only 50.5% of the time, against 75.5% for a k-mer retriever, and random 16S pairs already average cosine 0.90. The CUDA kernel is now the standalone gpusw package, reusable outside this project.</a:t>
             </a:r>
           </a:p>
         </p:txBody>
@@ -9707,7 +9800,7 @@
           <a:lstStyle/>
           <a:p>
             <a:r>
-              <a:t>Each amplicon is first classified by its best-hit identity against the Yarza/Stackebrandt bands (species 0.987, genus 0.945, family 0.865); below the family floor it abstains with a taxonomy-only record, so no false metabolism is injected, and a reliability gate drops hits with coverage under 0.90 or an SW-edlib identity discordance above 0.02. The shipped exact-tie union keeps every reference tied at the best identity, then one genome per BV-BRC species (the highest-identity assembly, the gene-richest on a further tie), so a densely sequenced species cannot flood the union, and gene count never changes the taxonomic call; the first survivor, the anchor, makes that call. On the original panel with 100-hit records the union keeps the source genome for 99.1% of the 67,466 amplicons whose record holds it or a same-taxon assembly (99.9% on full-length 16S), against 81.3% for the earlier legacy (ordered) reducer, whose order-dependent stages discarded it 12,602 times; every one of the union's 626 misses is species de-duplication keeping a conspecific assembly. Keeping ties has a cost with the source present: a 100-hit record lets the union grow, and V4 gene-capture precision falls to 0.795 against 0.856 for the legacy reducer. The accuracy tables that follow are scored under that legacy reducer, like for like with the earlier deck, while the shipped rule is the exact-tie union. Tie sets can also outgrow the record: for 453 of 60,461 distinct sequences all 100 retained hits are tied at the best score (median 19 species), and for 95 the whole 500-candidate shortlist is tied, so their probabilities come from a truncated sample of the co-optimal genomes.</a:t>
+              <a:t>Each amplicon is first classified by its best-hit identity against the Yarza/Stackebrandt bands (species 0.987, genus 0.945, family 0.865); below the family floor it abstains with a taxonomy-only record, so no false metabolism is injected, and a reliability gate drops hits with coverage under 0.90 or an SW-edlib identity discordance above 0.02. The shipped exact-tie union keeps every reference tied at the best identity, then one genome per BV-BRC species (the highest-identity assembly, the gene-richest on a further tie), so a densely sequenced species cannot flood the union, and gene count never changes the taxonomic call; the first survivor, the anchor, makes that call. On the original panel with 100-hit records the union keeps the source genome for 99.1% of the 67,466 amplicons whose record holds it or a same-taxon assembly (99.9% on full-length 16S), against 81.3% for the earlier legacy (ordered) reducer, whose order-dependent stages discarded it 12,602 times; every one of the union's 626 misses is species de-duplication keeping a conspecific assembly. Keeping ties has a cost with the source present: a 100-hit record lets the union grow, and V4 gene-capture precision falls to 0.795 against 0.856 for the legacy reducer. The slides that follow use the exact-tie union throughout, the rule users run; the legacy reducer stays available as an option. Tie sets can also outgrow the record: for 453 of 60,461 distinct sequences all 100 retained hits are tied at the best score (median 19 species), and for 95 the whole 500-candidate shortlist is tied, so their probabilities come from a truncated sample of the co-optimal genomes.</a:t>
             </a:r>
           </a:p>
         </p:txBody>
@@ -9987,7 +10080,7 @@
           <a:lstStyle/>
           <a:p>
             <a:r>
-              <a:t>The in-silico validation runs the unaltered pipeline on amplicons whose true genome and gene set are known: 10,000 taxonomy-stratified BV-BRC genomes (deterministic, seed 1729), in-silico PCR for 8 regions from V1–V2 to V7–V9 with full-length 16S as the positive control, 67,991 amplicons in all. Each amplicon is scored two ways from one run: self-inclusion leaves the source organism in the database, the realistic upper bound, while self-exclusion removes the source genome, its taxon and every hit at identity 0.987 or above, then re-selects, as if the organism were novel. Taxonomic accuracy is scored against the NCBI lineage and gene capture (macro recall) against the source genome's PGFam set. With the source present, genus accuracy is 0.94–0.99, family 0.96–0.99 and gene capture 0.95–0.99 (macro recall) across the regions; with it removed, among amplicons that still answer, genus accuracy is 0.60–0.74, gene capture 0.69–0.73 and family accuracy 0.80–0.86, 12–20 points above genus: family-level metabolism transfers even for novel organisms, and genus is where short amplicons pay. The whole-population figures, which count every non-answer as a miss, are on the denominators slide. The paired McNemar test (Holm across 28 pairs) finds genus accuracy different in 24 of 28 region pairs; the 4 that do not differ are full-length 16S against V1–V3, V1–V2 against V1–V3, V3–V4 against V7–V9, and V4–V5 against V4–V5 944R (Holm p 0.06–0.13). Every figure uses the legacy reducer on 100-hit records, the basis of the manuscript's tab:main (taxacc_region_summary.json, gene_capture_by_region.json and mcnemar_regions.json).</a:t>
+              <a:t>The in-silico validation runs the unaltered pipeline on amplicons whose true genome and gene set are known: 10,000 taxonomy-stratified BV-BRC genomes (deterministic, seed 1729), in-silico PCR for 8 regions from V1–V2 to V7–V9 with full-length 16S as the positive control, 67,991 amplicons in all. Each amplicon is scored two ways from one run: self-inclusion leaves the source organism in the database, the realistic upper bound, while self-exclusion removes the source genome, its taxon and every hit at identity 0.987 or above, then re-selects, as if the organism were novel. Taxonomic accuracy is scored against the NCBI lineage and gene capture (macro recall) against the source genome's PGFam set. With the source present, genus accuracy is 0.89–1.00, family 0.92–1.00 and gene capture 0.99–1.00 (macro recall) across the regions; with it removed, among amplicons that still answer, genus accuracy is 0.58–0.73, gene capture 0.66–0.70 and family accuracy 0.76–0.85, 11–18 points above genus: family-level metabolism transfers even for novel organisms, and genus is where short amplicons pay. The whole-population figures, which count every non-answer as a miss, are on the denominators slide. The paired McNemar test (Holm across 28 pairs) finds genus accuracy different in 26 of 28 region pairs; the 2 that do not differ are V1–V2 against V1–V3, and V3–V4 against V7–V9 (Holm p 0.09–0.14). Every figure uses the exact-tie union on 100-hit records, the basis of the manuscript's tab:main (taxacc_region_summary.json, gene_capture_by_region.json and mcnemar_regions.json).</a:t>
             </a:r>
           </a:p>
         </p:txBody>
@@ -13403,7 +13496,7 @@
                 </a:solidFill>
                 <a:latin typeface="Cambria"/>
               </a:rPr>
-              <a:t>Gene capture flat at ~26 points; genus loss jumps from V3 on</a:t>
+              <a:t>Gene capture 30–33 points; genus loss jumps from V3 on</a:t>
             </a:r>
           </a:p>
         </p:txBody>
@@ -13442,7 +13535,7 @@
                 </a:solidFill>
                 <a:latin typeface="Calibri"/>
               </a:rPr>
-              <a:t>Anchor predictor · legacy reducer · 100-hit records · loss = source present − source removed, among amplicons that answer</a:t>
+              <a:t>Anchor predictor · exact-tie union · 100-hit records · loss = source present − source removed, among amplicons that answer</a:t>
             </a:r>
           </a:p>
         </p:txBody>
@@ -13528,8 +13621,8 @@
         </p:nvSpPr>
         <p:spPr>
           <a:xfrm>
-            <a:off x="548640" y="3102026"/>
-            <a:ext cx="3108960" cy="1424253"/>
+            <a:off x="548640" y="3204860"/>
+            <a:ext cx="3108960" cy="1321419"/>
           </a:xfrm>
           <a:prstGeom prst="rect">
             <a:avLst/>
@@ -13585,8 +13678,8 @@
         </p:nvSpPr>
         <p:spPr>
           <a:xfrm>
-            <a:off x="548640" y="2383287"/>
-            <a:ext cx="3108960" cy="718738"/>
+            <a:off x="548640" y="2471273"/>
+            <a:ext cx="3108960" cy="733586"/>
           </a:xfrm>
           <a:prstGeom prst="rect">
             <a:avLst/>
@@ -13642,8 +13735,8 @@
         </p:nvSpPr>
         <p:spPr>
           <a:xfrm>
-            <a:off x="4541367" y="3102026"/>
-            <a:ext cx="3108960" cy="1424253"/>
+            <a:off x="4541367" y="3204860"/>
+            <a:ext cx="3108960" cy="1321419"/>
           </a:xfrm>
           <a:prstGeom prst="rect">
             <a:avLst/>
@@ -13686,7 +13779,7 @@
                 </a:solidFill>
                 <a:latin typeface="Calibri"/>
               </a:rPr>
-              <a:t>correct · 47%</a:t>
+              <a:t>correct · 44%</a:t>
             </a:r>
           </a:p>
         </p:txBody>
@@ -13699,8 +13792,8 @@
         </p:nvSpPr>
         <p:spPr>
           <a:xfrm>
-            <a:off x="4541367" y="2383287"/>
-            <a:ext cx="3108960" cy="718738"/>
+            <a:off x="4541367" y="2471273"/>
+            <a:ext cx="3108960" cy="733586"/>
           </a:xfrm>
           <a:prstGeom prst="rect">
             <a:avLst/>
@@ -13757,7 +13850,7 @@
         <p:spPr>
           <a:xfrm>
             <a:off x="4541367" y="1819931"/>
-            <a:ext cx="3108960" cy="563356"/>
+            <a:ext cx="3108960" cy="651342"/>
           </a:xfrm>
           <a:prstGeom prst="rect">
             <a:avLst/>
@@ -13800,7 +13893,7 @@
                 </a:solidFill>
                 <a:latin typeface="Calibri"/>
               </a:rPr>
-              <a:t>unnamed genus · 19%</a:t>
+              <a:t>unnamed genus · 22%</a:t>
             </a:r>
           </a:p>
         </p:txBody>
@@ -13976,7 +14069,7 @@
                 </a:solidFill>
                 <a:latin typeface="Cambria"/>
               </a:rPr>
-              <a:t>0.60–0.74</a:t>
+              <a:t>0.58–0.73</a:t>
             </a:r>
           </a:p>
           <a:p>
@@ -14054,7 +14147,7 @@
                 </a:solidFill>
                 <a:latin typeface="Cambria"/>
               </a:rPr>
-              <a:t>0.40–0.56</a:t>
+              <a:t>0.37–0.54</a:t>
             </a:r>
           </a:p>
           <a:p>
@@ -14190,7 +14283,7 @@
                 </a:solidFill>
                 <a:latin typeface="Calibri"/>
               </a:rPr>
-              <a:t>Anchor predictor · legacy reducer · 100-hit records · accuracy ranges by region; columns pooled, drawn to one scale</a:t>
+              <a:t>Anchor predictor · exact-tie union · 100-hit records · accuracy ranges by region; columns pooled, drawn to one scale</a:t>
             </a:r>
           </a:p>
         </p:txBody>
@@ -17862,7 +17955,7 @@
             </a:avLst>
           </a:prstGeom>
           <a:solidFill>
-            <a:srgbClr val="E8871A"/>
+            <a:srgbClr val="02C39A"/>
           </a:solidFill>
           <a:ln>
             <a:noFill/>
@@ -17899,7 +17992,7 @@
                 </a:solidFill>
                 <a:latin typeface="Calibri"/>
               </a:rPr>
-              <a:t>FAIL</a:t>
+              <a:t>PASS</a:t>
             </a:r>
           </a:p>
         </p:txBody>
@@ -17954,7 +18047,7 @@
                 </a:solidFill>
                 <a:latin typeface="Calibri"/>
               </a:rPr>
-              <a:t>run marked invalid · EC unchanged</a:t>
+              <a:t>amended · EC unchanged</a:t>
             </a:r>
           </a:p>
         </p:txBody>
@@ -18476,7 +18569,7 @@
             </a:avLst>
           </a:prstGeom>
           <a:solidFill>
-            <a:srgbClr val="E8871A"/>
+            <a:srgbClr val="02C39A"/>
           </a:solidFill>
           <a:ln>
             <a:noFill/>
@@ -18513,7 +18606,7 @@
                 </a:solidFill>
                 <a:latin typeface="Calibri"/>
               </a:rPr>
-              <a:t>FAIL</a:t>
+              <a:t>PASS</a:t>
             </a:r>
           </a:p>
         </p:txBody>
@@ -18568,7 +18661,7 @@
                 </a:solidFill>
                 <a:latin typeface="Calibri"/>
               </a:rPr>
-              <a:t>10 truth rows in 5 genomes, zero allowed → cause and fix next</a:t>
+              <a:t>0 of 8,614 rows gated · 49 before amendment A-C12</a:t>
             </a:r>
           </a:p>
         </p:txBody>
@@ -20325,7 +20418,7 @@
                 </a:solidFill>
                 <a:latin typeface="Cambria"/>
               </a:rPr>
-              <a:t>Why C12 fails: ATP from nothing in 44 models</a:t>
+              <a:t>Why C12 failed: ATP from nothing in 44 models</a:t>
             </a:r>
           </a:p>
           <a:p>
@@ -20341,7 +20434,7 @@
                 </a:solidFill>
                 <a:latin typeface="Calibri"/>
               </a:rPr>
-              <a:t>Each a closed loop that one gapfilled reaction completes</a:t>
+              <a:t>Pre-registered run · each a closed loop that one gapfilled reaction completes</a:t>
             </a:r>
           </a:p>
         </p:txBody>
@@ -21694,7 +21787,7 @@
                 </a:solidFill>
                 <a:latin typeface="Cambria"/>
               </a:rPr>
-              <a:t>C12 should pass</a:t>
+              <a:t>C12 passes</a:t>
             </a:r>
           </a:p>
           <a:p>
@@ -21722,11 +21815,11 @@
             <a:r>
               <a:rPr sz="1600" b="0" i="0">
                 <a:solidFill>
-                  <a:srgbClr val="E8871A"/>
+                  <a:srgbClr val="FFFFFF"/>
                 </a:solidFill>
                 <a:latin typeface="Calibri"/>
               </a:rPr>
-              <a:t>180 gapfilled genomes not yet tested</a:t>
+              <a:t>0 of 8,614 gapfilled rows gated, all 200 genomes</a:t>
             </a:r>
           </a:p>
         </p:txBody>
@@ -21926,7 +22019,7 @@
                 </a:solidFill>
                 <a:latin typeface="Calibri"/>
               </a:rPr>
-              <a:t>1,000 genomes · 2–3 h</a:t>
+              <a:t>1,000 genomes · unchanged</a:t>
             </a:r>
           </a:p>
         </p:txBody>
@@ -22048,7 +22141,7 @@
                 </a:solidFill>
                 <a:latin typeface="Calibri"/>
               </a:rPr>
-              <a:t>200 genomes · 4–6 h</a:t>
+              <a:t>200 genomes · 0 gated</a:t>
             </a:r>
           </a:p>
         </p:txBody>
@@ -22170,7 +22263,7 @@
                 </a:solidFill>
                 <a:latin typeface="Calibri"/>
               </a:rPr>
-              <a:t>C11, C12, folds</a:t>
+              <a:t>C11, C12 pass · valid</a:t>
             </a:r>
           </a:p>
         </p:txBody>
@@ -22209,7 +22302,7 @@
                 </a:solidFill>
                 <a:latin typeface="Calibri"/>
               </a:rPr>
-              <a:t>ModelSEEDTemplates 21a8084, validated on the 20 affected genomes · run not started; needs the authors' go-ahead</a:t>
+              <a:t>ModelSEEDTemplates 21a8084, validated first on the 20 affected genomes · run 2026-10-27/28, ModelSEEDpy pinned at the pre-registered commit</a:t>
             </a:r>
           </a:p>
         </p:txBody>
@@ -22772,7 +22865,7 @@
                 </a:solidFill>
                 <a:latin typeface="Cambria"/>
               </a:rPr>
-              <a:t>Curated PRs ready · ModelSEED submission pending</a:t>
+              <a:t>Curated PRs submitted · issue #10 filed</a:t>
             </a:r>
           </a:p>
         </p:txBody>
@@ -23496,7 +23589,7 @@
                 </a:solidFill>
                 <a:latin typeface="Calibri"/>
               </a:rPr>
-              <a:t>Original panel, 67,991 amplicons, τ = 0.987 · table: legacy reducer unless marked · population figures count an abstention as a miss</a:t>
+              <a:t>Original panel, 67,991 amplicons, τ = 0.987 · table: legacy reducer, the only rule with a depth-20 headline scoring, unless marked</a:t>
             </a:r>
           </a:p>
         </p:txBody>
@@ -23620,7 +23713,7 @@
                 </a:solidFill>
                 <a:latin typeface="Cambria"/>
               </a:rPr>
-              <a:t>At depth 100 the two selection rules diverge</a:t>
+              <a:t>One rule throughout: the exact-tie union</a:t>
             </a:r>
           </a:p>
           <a:p>
@@ -23636,7 +23729,7 @@
                 </a:solidFill>
                 <a:latin typeface="Calibri"/>
               </a:rPr>
-              <a:t>Exact-tie union (shipped default) vs legacy reducer</a:t>
+              <a:t>Decided 2026-10-27 · the legacy reducer stays a user option</a:t>
             </a:r>
           </a:p>
         </p:txBody>
@@ -24274,7 +24367,7 @@
                 </a:solidFill>
                 <a:latin typeface="Cambria"/>
               </a:rPr>
-              <a:t>Decision needed: one rule for the whole paper</a:t>
+              <a:t>Broader and less precise, but what users run</a:t>
             </a:r>
             <a:r>
               <a:rPr sz="1800" b="1">
@@ -24283,7 +24376,7 @@
                 </a:solidFill>
                 <a:latin typeface="Cambria"/>
               </a:rPr>
-              <a:t>  ·  our lean: union throughout</a:t>
+              <a:t>  ·  legacy stays an option</a:t>
             </a:r>
           </a:p>
         </p:txBody>
@@ -27400,7 +27493,7 @@
                 </a:solidFill>
                 <a:latin typeface="Cambria"/>
               </a:rPr>
-              <a:t>+0.105 to +0.192</a:t>
+              <a:t>+0.103 to +0.212</a:t>
             </a:r>
           </a:p>
           <a:p>
@@ -27574,7 +27667,7 @@
                 </a:solidFill>
                 <a:latin typeface="Cambria"/>
               </a:rPr>
-              <a:t>0.248 vs 0.594</a:t>
+              <a:t>0.248 vs 0.605</a:t>
             </a:r>
           </a:p>
           <a:p>
@@ -27632,7 +27725,7 @@
                 </a:solidFill>
                 <a:latin typeface="Calibri"/>
               </a:rPr>
-              <a:t>Amplicon cells: depth-100 records, legacy reducer  ·  conditional on both arms answering, n = 1,614–2,322 per point</a:t>
+              <a:t>Amplicon cells: depth-100 records, exact-tie union  ·  conditional on both arms answering, n = 1,603–2,311 per point</a:t>
             </a:r>
           </a:p>
         </p:txBody>
@@ -27899,7 +27992,7 @@
                 </a:solidFill>
                 <a:latin typeface="Cambria"/>
               </a:rPr>
-              <a:t>31.8%</a:t>
+              <a:t>26.7%</a:t>
             </a:r>
           </a:p>
           <a:p>
@@ -27918,7 +28011,7 @@
                 </a:solidFill>
                 <a:latin typeface="Calibri"/>
               </a:rPr>
-              <a:t>of newly admitted beat full-length 16S (0.691)</a:t>
+              <a:t>of newly admitted beat full-length 16S (0.710)</a:t>
             </a:r>
           </a:p>
         </p:txBody>
@@ -27957,7 +28050,7 @@
                 </a:solidFill>
                 <a:latin typeface="Calibri"/>
               </a:rPr>
-              <a:t>Self-exclusion at ANI 95, 100% complete  ·  16S level: depth-100 records, legacy reducer</a:t>
+              <a:t>Self-exclusion at ANI 95, 100% complete  ·  16S level: depth-100 records, exact-tie union</a:t>
             </a:r>
           </a:p>
         </p:txBody>
@@ -30119,7 +30212,7 @@
                 </a:solidFill>
                 <a:latin typeface="Cambria"/>
               </a:rPr>
-              <a:t>Wiring it in changes GTDB picks: the authors' call</a:t>
+              <a:t>Deferred to future work: it changes GTDB picks</a:t>
             </a:r>
           </a:p>
         </p:txBody>
@@ -31388,7 +31481,7 @@
                 </a:solidFill>
                 <a:latin typeface="Cambria"/>
               </a:rPr>
-              <a:t>−0.22 to −0.29</a:t>
+              <a:t>−0.20 to −0.29</a:t>
             </a:r>
           </a:p>
           <a:p>
@@ -31466,7 +31559,7 @@
                 </a:solidFill>
                 <a:latin typeface="Cambria"/>
               </a:rPr>
-              <a:t>up to +0.07</a:t>
+              <a:t>≤ 0.07</a:t>
             </a:r>
           </a:p>
           <a:p>
@@ -31485,7 +31578,7 @@
                 </a:solidFill>
                 <a:latin typeface="Calibri"/>
               </a:rPr>
-              <a:t>conditional genus accuracy, alternative panels higher</a:t>
+              <a:t>conditional genus accuracy, either direction</a:t>
             </a:r>
           </a:p>
         </p:txBody>
@@ -31544,7 +31637,7 @@
                 </a:solidFill>
                 <a:latin typeface="Cambria"/>
               </a:rPr>
-              <a:t>≤ 0.027</a:t>
+              <a:t>≤ 0.028</a:t>
             </a:r>
           </a:p>
           <a:p>
@@ -31602,7 +31695,7 @@
                 </a:solidFill>
                 <a:latin typeface="Calibri"/>
               </a:rPr>
-              <a:t>Chart: V4 · record depth 100 · legacy reducer · 1,000 phylum-stratified bootstrap replicates</a:t>
+              <a:t>Chart: V4 · record depth 100 · exact-tie union · 1,000 phylum-stratified bootstrap replicates</a:t>
             </a:r>
           </a:p>
         </p:txBody>
@@ -31752,7 +31845,7 @@
                 </a:solidFill>
                 <a:latin typeface="Cambria"/>
               </a:rPr>
-              <a:t>1.9–2.8%</a:t>
+              <a:t>2.4–3.4%</a:t>
             </a:r>
           </a:p>
           <a:p>
@@ -31888,7 +31981,7 @@
                 </a:solidFill>
                 <a:latin typeface="Calibri"/>
               </a:rPr>
-              <a:t>Record depth 100 · legacy reducer · coverage = gene capture, crude</a:t>
+              <a:t>Record depth 100 · exact-tie union · coverage = gene capture, crude</a:t>
             </a:r>
           </a:p>
         </p:txBody>
@@ -32213,7 +32306,7 @@
                 </a:solidFill>
                 <a:latin typeface="Calibri"/>
               </a:rPr>
-              <a:t>Phylum-standardized · GTDB r226, exclusion at ANI ≥ 95 · 16S at record depth 100, legacy reducer</a:t>
+              <a:t>Phylum-standardized · GTDB r226, exclusion at ANI ≥ 95 · 16S at record depth 100, exact-tie union</a:t>
             </a:r>
           </a:p>
         </p:txBody>
@@ -32482,7 +32575,7 @@
                 </a:solidFill>
                 <a:latin typeface="Cambria"/>
               </a:rPr>
-              <a:t>67 · 32 · 4</a:t>
+              <a:t>67 · 32 · 4 · 9</a:t>
             </a:r>
           </a:p>
           <a:p>
@@ -32501,7 +32594,7 @@
                 </a:solidFill>
                 <a:latin typeface="Calibri"/>
               </a:rPr>
-              <a:t>manuscript findings in 3 rounds, all fixed</a:t>
+              <a:t>manuscript findings in 4 rounds, all fixed</a:t>
             </a:r>
           </a:p>
         </p:txBody>
@@ -32707,7 +32800,7 @@
                           </a:solidFill>
                           <a:latin typeface="Calibri"/>
                         </a:rPr>
-                        <a:t>fix planned</a:t>
+                        <a:t>applied in A-C12</a:t>
                       </a:r>
                     </a:p>
                   </a:txBody>
@@ -32736,7 +32829,7 @@
                           </a:solidFill>
                           <a:latin typeface="Calibri"/>
                         </a:rPr>
-                        <a:t>Four figures off their captions</a:t>
+                        <a:t>ModelSEEDpy moved under the first C12 run</a:t>
                       </a:r>
                     </a:p>
                   </a:txBody>
@@ -32763,7 +32856,7 @@
                           </a:solidFill>
                           <a:latin typeface="Calibri"/>
                         </a:rPr>
-                        <a:t>re-rendered</a:t>
+                        <a:t>pinned, rerun</a:t>
                       </a:r>
                     </a:p>
                   </a:txBody>
@@ -33058,7 +33151,7 @@
                 </a:solidFill>
                 <a:latin typeface="Cambria"/>
               </a:rPr>
-              <a:t>Decisions</a:t>
+              <a:t>Decided</a:t>
             </a:r>
           </a:p>
         </p:txBody>
@@ -33117,7 +33210,7 @@
                 </a:solidFill>
                 <a:latin typeface="Calibri"/>
               </a:rPr>
-              <a:t>C12 fix: amend and re-run</a:t>
+              <a:t>Exact-tie union throughout</a:t>
             </a:r>
           </a:p>
         </p:txBody>
@@ -33233,7 +33326,7 @@
                 </a:solidFill>
                 <a:latin typeface="Calibri"/>
               </a:rPr>
-              <a:t>One selection rule</a:t>
+              <a:t>GTDB map: future work</a:t>
             </a:r>
           </a:p>
         </p:txBody>
@@ -33349,7 +33442,7 @@
                 </a:solidFill>
                 <a:latin typeface="Calibri"/>
               </a:rPr>
-              <a:t>Wire in the accession map</a:t>
+              <a:t>ModelSEED PRs and issue #10 filed</a:t>
             </a:r>
           </a:p>
         </p:txBody>
@@ -33465,7 +33558,7 @@
                 </a:solidFill>
                 <a:latin typeface="Calibri"/>
               </a:rPr>
-              <a:t>Submit the ModelSEED PRs</a:t>
+              <a:t>C12 amended: passes</a:t>
             </a:r>
           </a:p>
         </p:txBody>
@@ -34157,7 +34250,7 @@
                 </a:solidFill>
                 <a:latin typeface="Calibri"/>
               </a:rPr>
-              <a:t>A 100-hit record: the GPU keeps the best 200 of a 500-candidate shortlist</a:t>
+              <a:t>A 100-hit record: the GPU ranks a 500-candidate shortlist, Biopython aligns the top 100</a:t>
             </a:r>
           </a:p>
         </p:txBody>
@@ -34357,7 +34450,7 @@
                 </a:solidFill>
                 <a:latin typeface="Calibri"/>
               </a:rPr>
-              <a:t>keeps best 200 of 500</a:t>
+              <a:t>ranks all 500</a:t>
             </a:r>
           </a:p>
         </p:txBody>
@@ -34460,7 +34553,7 @@
                 </a:solidFill>
                 <a:latin typeface="Cambria"/>
               </a:rPr>
-              <a:t>Biopython rescore</a:t>
+              <a:t>Biopython alignment</a:t>
             </a:r>
           </a:p>
           <a:p>
@@ -34479,7 +34572,7 @@
                 </a:solidFill>
                 <a:latin typeface="Calibri"/>
               </a:rPr>
-              <a:t>200 aligned → 100 kept</a:t>
+              <a:t>top 100: identity, coordinates</a:t>
             </a:r>
           </a:p>
         </p:txBody>
@@ -34712,7 +34805,7 @@
                 </a:solidFill>
                 <a:latin typeface="Cambria"/>
               </a:rPr>
-              <a:t>400/400</a:t>
+              <a:t>6.0M</a:t>
             </a:r>
           </a:p>
           <a:p>
@@ -34731,7 +34824,7 @@
                 </a:solidFill>
                 <a:latin typeface="Calibri"/>
               </a:rPr>
-              <a:t>control pairs bit-exact</a:t>
+              <a:t>depth-100 hits bit-exact to Biopython</a:t>
             </a:r>
           </a:p>
         </p:txBody>
@@ -34790,7 +34883,7 @@
                 </a:solidFill>
                 <a:latin typeface="Cambria"/>
               </a:rPr>
-              <a:t>6.9 h</a:t>
+              <a:t>5.9 h</a:t>
             </a:r>
           </a:p>
           <a:p>
@@ -34809,7 +34902,7 @@
                 </a:solidFill>
                 <a:latin typeface="Calibri"/>
               </a:rPr>
-              <a:t>for 60,461 unique amplicons</a:t>
+              <a:t>for 60,461 unique amplicons, as run now</a:t>
             </a:r>
           </a:p>
         </p:txBody>
@@ -38307,7 +38400,7 @@
                 </a:solidFill>
                 <a:latin typeface="Cambria"/>
               </a:rPr>
-              <a:t>0.94–0.99</a:t>
+              <a:t>0.89–1.00</a:t>
             </a:r>
           </a:p>
         </p:txBody>
@@ -38366,7 +38459,7 @@
                 </a:solidFill>
                 <a:latin typeface="Cambria"/>
               </a:rPr>
-              <a:t>0.95–0.99</a:t>
+              <a:t>0.99–1.00</a:t>
             </a:r>
           </a:p>
         </p:txBody>
@@ -38425,7 +38518,7 @@
                 </a:solidFill>
                 <a:latin typeface="Cambria"/>
               </a:rPr>
-              <a:t>0.96–0.99</a:t>
+              <a:t>0.92–1.00</a:t>
             </a:r>
           </a:p>
         </p:txBody>
@@ -38559,7 +38652,7 @@
                 </a:solidFill>
                 <a:latin typeface="Cambria"/>
               </a:rPr>
-              <a:t>0.60–0.74</a:t>
+              <a:t>0.58–0.73</a:t>
             </a:r>
           </a:p>
         </p:txBody>
@@ -38618,7 +38711,7 @@
                 </a:solidFill>
                 <a:latin typeface="Cambria"/>
               </a:rPr>
-              <a:t>0.69–0.73</a:t>
+              <a:t>0.66–0.70</a:t>
             </a:r>
           </a:p>
         </p:txBody>
@@ -38677,7 +38770,7 @@
                 </a:solidFill>
                 <a:latin typeface="Cambria"/>
               </a:rPr>
-              <a:t>0.80–0.86</a:t>
+              <a:t>0.76–0.85</a:t>
             </a:r>
           </a:p>
         </p:txBody>
@@ -38716,7 +38809,7 @@
                 </a:solidFill>
                 <a:latin typeface="Calibri"/>
               </a:rPr>
-              <a:t>Anchor predictor · legacy reducer · 100-hit records · gene capture = macro recall</a:t>
+              <a:t>Anchor predictor · exact-tie union · 100-hit records · gene capture = macro recall</a:t>
             </a:r>
           </a:p>
         </p:txBody>

--- a/presentations/prFBA_updates_2026-10.pptx
+++ b/presentations/prFBA_updates_2026-10.pptx
@@ -7560,7 +7560,7 @@
           <a:lstStyle/>
           <a:p>
             <a:r>
-              <a:t>This update reports every benchmark result at the new standard record depth: each amplicon now keeps its 100 best hits, from an edlib shortlist of 500 candidates that is rescored in full; the previous deck used 20-hit records. Both real-ASV deployment runs (the KBase build and the weighting census) predate the standard and are labelled as 20-hit runs. The headline has not changed direction: on a controlled benchmark, where both methods share one reference set, one answer key and leave-genus-out folds, PICRUSt2 predicts EC content more accurately than prFBA, beyond the effect size fixed in advance. Its gapfill phenotype gate (C12), which failed in the pre-registered run, passes under amendment A-C12 (corrected templates, post hoc and disclosed), so that leave-genus-out run is valid; no EC number changed. New in this deck is a calibration of the per-function weight p(function): it ranks functions correctly but is overconfident, and thresholding it barely moves accuracy. Raising the record depth more than halved the self-exclusion abstention rate under the shipped exact-tie rule while leaving conditional quality roughly unchanged, so coverage and population figures remain lower bounds. Re-run at depth 100 under one selection rule, the three-panel comparison still shows conditional quality generalizing across panels while self-exclusion coverage does not.</a:t>
+              <a:t>This update reports every benchmark result at the new standard record depth: each amplicon now keeps its 100 best hits, from an edlib shortlist of 500 candidates that is rescored in full; the previous deck used 20-hit records. Both real-ASV deployment runs (the KBase build and the weighting census) predate the standard and are labelled as 20-hit runs. The headline has not changed direction: on a controlled benchmark, where both methods share one reference set, one answer key and leave-genus-out folds, PICRUSt2 predicts EC content more accurately than prFBA, beyond the effect size fixed in advance. Its gapfill phenotype gate (C12), which failed in the pre-registered run, passes under amendments A-C12 and A-C13 (corrected templates, post hoc and disclosed), so that leave-genus-out run is valid; no EC number changed. New in this deck is a calibration of the per-function weight p(function): it ranks functions correctly but is overconfident, and thresholding it barely moves accuracy. Raising the record depth more than halved the self-exclusion abstention rate under the shipped exact-tie rule while leaving conditional quality roughly unchanged, so coverage and population figures remain lower bounds. Re-run at depth 100 under one selection rule, the three-panel comparison still shows conditional quality generalizing across panels while self-exclusion coverage does not.</a:t>
             </a:r>
           </a:p>
         </p:txBody>
@@ -8190,7 +8190,7 @@
           <a:lstStyle/>
           <a:p>
             <a:r>
-              <a:t>Every arm is scored on the same 63,871 cells against the same answer key, with abstentions counted as zero. prFBA reaches population EC F1 0.687 against PICRUSt2's 0.779 (−0.092, 95% CI −0.107 to −0.081); forced to answer it reaches 0.747 and still trails by 0.031, so about two thirds of the deficit is abstention and the rest is in the answers. The bar the design registered is nn1, copying the single top-ranked surviving reference: forced prFBA only ties it (0.747 against 0.745, a margin with no paired test), the abstaining arm falls 0.058 below it, and PICRUSt2 clears it by 0.034. At leave-family-out the gap widens to −0.124 (forced −0.040) and prFBA's skill score falls to −0.14, a point estimate whose interval against the prevalence floor spans zero; clade-max is an oracle chosen against the truth, a ceiling and not a method to beat. These numbers do not depend on the as-shipped record depth: each fold ran its own alignment at k2 = 200, and 'prFBA' is the legacy rule that leave-one-fold-out selection picked in every fold (the shipped exact-tie rule scores 0.685). Validity: the include-self ceiling control C2 passes (prFBA source recovery 1.00, PICRUSt2 0.899 against a soft 0.85 flag; data_c2/summary_incself.json and data/controls.json), and the gapfill validity gate C12 passes under amendment A-C12 (post hoc and disclosed: corrected templates and the gapfiller's reversals), so the leave-genus-out artefact is valid; rescoring changed no EC number, and the next three slides show why C12 failed in the pre-registered run and how the fix cleared it. Sources: shared_reference/data/summary_genus.json and data_family/summary_family.json.</a:t>
+              <a:t>Every arm is scored on the same 63,871 cells against the same answer key, with abstentions counted as zero. prFBA reaches population EC F1 0.687 against PICRUSt2's 0.779 (−0.092, 95% CI −0.107 to −0.081); forced to answer it reaches 0.747 and still trails by 0.031, so about two thirds of the deficit is abstention and the rest is in the answers. The bar the design registered is nn1, copying the single top-ranked surviving reference: forced prFBA only ties it (0.747 against 0.745, a margin with no paired test), the abstaining arm falls 0.058 below it, and PICRUSt2 clears it by 0.034. At leave-family-out the gap widens to −0.124 (forced −0.040) and prFBA's skill score falls to −0.14, a point estimate whose interval against the prevalence floor spans zero; clade-max is an oracle chosen against the truth, a ceiling and not a method to beat. These numbers do not depend on the as-shipped record depth: each fold ran its own alignment at k2 = 200, and 'prFBA' is the legacy rule that leave-one-fold-out selection picked in every fold (the shipped exact-tie rule scores 0.685). Validity: the include-self ceiling control C2 passes (prFBA source recovery 1.00, PICRUSt2 0.899 against a soft 0.85 flag; data_c2/summary_incself.json and data/controls.json), and the gapfill validity gate C12 passes under amendments A-C12 and A-C13 (post hoc and disclosed: corrected templates, the gapfiller's reversals and an updated ModelSEEDpy), so the leave-genus-out artefact is valid; rescoring changed no EC number, and the next three slides show why C12 failed in the pre-registered run and how the fix cleared it. Sources: shared_reference/data/summary_genus.json and data_family/summary_family.json.</a:t>
             </a:r>
           </a:p>
         </p:txBody>
@@ -8260,7 +8260,7 @@
           <a:lstStyle/>
           <a:p>
             <a:r>
-              <a:t>Each arm's predicted EC set goes through one fixed ModelSEED reconstruction, and the model is asked on which of 54 media it can make ATP; only 22 ever carry signal, and the score is the number of media called wrong against the model built from the truth genome's own annotation (which, rebuilt, scores 0.00). Over the 755 ATP-informative genomes (prFBA answers all 1,000 assayed), where its EC-F1 gap to PICRUSt2 is only −0.028, prFBA calls 0.13 more media wrong than PICRUSt2 (Wilcoxon p = 0.49, BH q = 0.49): no detectable mean difference, a null and not an equivalence. Per medium, PICRUSt2 is ahead on 2 of 22 testable media (Ac.NO, Etho.O2; McNemar q = 0.002), and against copying the nearest reference prFBA calls 0.15 fewer media wrong (q = 0.028), the baseline it ties on ECs. PICRUSt2's drafts share more of the truth's reactions (median reaction Jaccard 0.737 against 0.707); on reaction Jaccard, essentiality and growth prFBA is indistinguishable from the nearest-reference baseline, and those readouts are unpaired medians with no paired test specified. The identity control C11 passes: one EC set built twice gives identical models. The validity gate C12 passes under amendment A-C12 (templates 21a8084 with the gapfiller's reversals applied, post hoc and disclosed): no gapfilled model of any arm makes ATP or biomass from water and protons (0 of 8,614 rows, against 49 in the pre-registered run, 10 of them truth rows), so every genome stays in every arm's gapfilled comparison; the ATP pass on the corrected templates reproduced the pre-registered pass row for row, so the ATP numbers here are unchanged, and the next two slides show the pre-registered failure's cause and the fix. The phenotype arm uses the shipped exact-tie rule on 1,000 pre-specified genomes (ATP) and a 200-genome gapfilled subsample; sources: shared_reference/data/phenotype_atp_c12fix/ and phenotype_gf_c12fix/phenotype_summary.json, data/controls.json.</a:t>
+              <a:t>Each arm's predicted EC set goes through one fixed ModelSEED reconstruction, and the model is asked on which of 54 media it can make ATP; only 22 ever carry signal, and the score is the number of media called wrong against the model built from the truth genome's own annotation (which, rebuilt, scores 0.00). Over the 755 ATP-informative genomes (prFBA answers all 1,000 assayed), where its EC-F1 gap to PICRUSt2 is only −0.028, prFBA calls 0.13 more media wrong than PICRUSt2 (Wilcoxon p = 0.49, BH q = 0.49): no detectable mean difference, a null and not an equivalence. Per medium, PICRUSt2 is ahead on 2 of 22 testable media (Ac.NO, Etho.O2; McNemar q = 0.002), and against copying the nearest reference prFBA calls 0.15 fewer media wrong (q = 0.028), the baseline it ties on ECs. PICRUSt2's drafts share more of the truth's reactions (median reaction Jaccard 0.737 against 0.707); on reaction Jaccard, essentiality and growth prFBA is indistinguishable from the nearest-reference baseline, and those readouts are unpaired medians with no paired test specified. The identity control C11 passes: one EC set built twice gives identical models. The validity gate C12 passes under amendments A-C12 and A-C13 (templates 21a8084 with the gapfiller's reversals applied, on ModelSEEDpy c2e31a0, post hoc and disclosed): no gapfilled model of any arm makes ATP or biomass from water and protons (0 of 8,614 rows, against 49 in the pre-registered run, 10 of them truth rows), so every genome stays in every arm's gapfilled comparison; the ATP pass on the corrected templates reproduced the pre-registered pass row for row, so the ATP numbers here are unchanged, and the next two slides show the pre-registered failure's cause and the fix. The phenotype arm uses the shipped exact-tie rule on 1,000 pre-specified genomes (ATP) and a 200-genome gapfilled subsample; sources: shared_reference/data/phenotype_atp_c13/ and phenotype_gf_c13/phenotype_summary.json, data/controls.json.</a:t>
             </a:r>
           </a:p>
         </p:txBody>
@@ -8470,7 +8470,7 @@
           <a:lstStyle/>
           <a:p>
             <a:r>
-              <a:t>The fix restricts five template reactions to their physiological direction (rxn00006, rxn10966, rxn00381, rxn00084, rxn08167; ModelSEEDTemplates 21a8084) and applies the reversals the gapfiller proposes, which the pipeline's ModelSEEDpy fork drops. Rebuilt from the patched template files over all 218 gapfilled models of the 20 affected genomes, it takes the leaking models from 44 to 0 with 0 new leaks; every model grows (0 non-growers, against 10 as shipped, all of them dropped reversals), and the models that already passed keep their growth (median ratio 1.000 against the original templates with reversals applied). The amendment has since run (SPEC section 14, with ModelSEEDpy pinned to the commit the pre-registered run used, after the first launch was found importing a moved editable install). The ATP pass on the corrected templates reproduced the pre-registered pass row for row, so its readouts did not move. The gapfilled pass gated 0 of 8,614 rows against 49, with 0 new leaks in all 200 genomes, the 180 outside the validation included, and 0 non-growing models against 136; rescored, C11 and C12 pass and the leave-genus-out artefact is valid, with every EC number unchanged (0.687 against 0.779). Sources: region_validation/shared_reference/C12_FIX_PLAN.md, C12_SCOPE.md and data/template_direction_audit/validation_summary.json (entries baseline, base+rev and PR1v2+rev).</a:t>
+              <a:t>The fix restricts five template reactions to their physiological direction (rxn00006, rxn10966, rxn00381, rxn00084, rxn08167; ModelSEEDTemplates 21a8084) and applies the reversals the gapfiller proposes, which the pipeline's ModelSEEDpy fork drops. Rebuilt from the patched template files over all 218 gapfilled models of the 20 affected genomes, it takes the leaking models from 44 to 0 with 0 new leaks; every model grows (0 non-growers, against 10 as shipped, all of them dropped reversals), and the models that already passed keep their growth (median ratio 1.000 against the original templates with reversals applied). The amendment has since run (SPEC section 14, with ModelSEEDpy pinned to the commit the pre-registered run used, after the first launch was found importing a moved editable install), and amendment A-C13 (section 15) reran it on ModelSEEDpy c2e31a0, which fixes the builder's demand reactions and an ATP-correction step; the figures below are A-C13's. The ATP pass on the corrected templates reproduced the pre-registered pass row for row, so its readouts did not move. The gapfilled pass gated 0 of 8,614 rows against 49, with 0 new leaks in all 200 genomes, the 180 outside the validation included, and 0 non-growing models against 136; rescored, C11 and C12 pass and the leave-genus-out artefact is valid, with every EC number unchanged (0.687 against 0.779). Sources: region_validation/shared_reference/C12_FIX_PLAN.md, C12_SCOPE.md and data/template_direction_audit/validation_summary.json (entries baseline, base+rev and PR1v2+rev).</a:t>
             </a:r>
           </a:p>
         </p:txBody>
@@ -9590,7 +9590,7 @@
           <a:lstStyle/>
           <a:p>
             <a:r>
-              <a:t>Since the last deck, the depth-100 rerun and everything built on it went through adversarial checks that re-derive each claim from the primary files. The report comparing the depth-100 rerun with the earlier results (region_validation_d100/D100_VS_D20.md) was checked claim by claim by independent verifiers: 85 of 91 claims confirmed, with the corrections listed in its section 5. The manuscript's depth-100 revision went through three verification rounds, with 67, 32 and 4 findings, every one applied; a fourth re-derived every number the switch to the exact-tie union changed or added, about 580, found none wrong, and found 9 text and figure defects, all fixed (region_validation_d100/UNION_VERIFICATION.md). The ModelSEED template PR texts went through 3 rounds of review; one caught that the first fix set NadX to the database's reverse direction, which blocks the first step of NAD synthesis in organisms without NadB, so the fix became five reactions with L-aspartate oxidase (rxn08167) restricted forward. Faults caught on the way: the ModelSEEDpy fork's MSBuilder.build_and_gapfill drops the gapfiller's reversals (amendment A-C12 applies them in prFBA's own gapfill step; the fork itself still needs the fix); the editable ModelSEEDpy install moved under the first A-C12 launch (another session's commits change ATP correction and demand reactions), so both passes were rerun pinned to the pre-registered commit, which reproduces every stored row; four manuscript figures were still the earlier renders under the revised captions and were re-rendered. Two stay open: the legacy reducer's two scoring passes disagree on self-exclusion abstentions (6,482 in score_taxacc's estimator path against 7,344 in the gene-capture selection), and in 23–33 full-length rows per k-means and random tree the cells' source taxon differs from the truth file's, an effect of at most 0.06 points on the emptied share. Earlier audits checked 595 manuscript claims (161 defects corrected) and 598 deck claims plus 377 over the fixes (54 and 14 defects), all fixed, and our own runs caught 4 pipeline faults before that.</a:t>
+              <a:t>Since the last deck, the depth-100 rerun and everything built on it went through adversarial checks that re-derive each claim from the primary files. The report comparing the depth-100 rerun with the earlier results (region_validation_d100/D100_VS_D20.md) was checked claim by claim by independent verifiers: 85 of 91 claims confirmed, with the corrections listed in its section 5. The manuscript's depth-100 revision went through three verification rounds, with 67, 32 and 4 findings, every one applied; a fourth re-derived every number the switch to the exact-tie union changed or added, about 580, found none wrong, and found 9 text and figure defects, all fixed (region_validation_d100/UNION_VERIFICATION.md). The ModelSEED template PR texts went through 3 rounds of review; one caught that the first fix set NadX to the database's reverse direction, which blocks the first step of NAD synthesis in organisms without NadB, so the fix became five reactions with L-aspartate oxidase (rxn08167) restricted forward. Faults caught on the way: the ModelSEEDpy fork's MSBuilder.build_and_gapfill drops the gapfiller's reversals; amendment A-C12 applies them in prFBA's own gapfill step, and the fork is fixed on a branch whose own build_and_gapfill now reproduces the harness's models, while the unfixed builder returned all four test models unable to grow (PR text: region_validation/shared_reference/PR_ModelSEEDpy_gapfill_reversals.md). The editable ModelSEEDpy install moved under the first A-C12 launch, so both passes were rerun pinned to the pre-registered commit, which reproduces every stored row; the commits it had moved to fix two real build defects (demand reactions built as free sources of six drain compounds, invisible to the validity gate, and an ATP-correction step that could undo its own loop filter), so amendment A-C13 reran both passes on them; four manuscript figures were still the earlier renders under the revised captions and were re-rendered. Two stay open: the legacy reducer's two scoring passes disagree on self-exclusion abstentions (6,482 in score_taxacc's estimator path against 7,344 in the gene-capture selection), and in 23–33 full-length rows per k-means and random tree the cells' source taxon differs from the truth file's, an effect of at most 0.06 points on the emptied share. Earlier audits checked 595 manuscript claims (161 defects corrected) and 598 deck claims plus 377 over the fixes (54 and 14 defects), all fixed, and our own runs caught 4 pipeline faults before that.</a:t>
             </a:r>
           </a:p>
         </p:txBody>
@@ -9660,7 +9660,7 @@
           <a:lstStyle/>
           <a:p>
             <a:r>
-              <a:t>Four decisions are made. First, one selection rule: the exact-tie union is used throughout the paper and the deck; the legacy (ordered) reducer stays a user option and appears only in the labelled depth-20 versus depth-100 comparisons. Second, the GTDB accession map is built but deferred to future work, because wiring it in changes which genomes a GTDB hit selects. Third, the ModelSEED template pull requests and the direction-audit issue (ModelSEED/ModelSEEDTemplates#10) were filed on 2026-10-27. Fourth, the C12 fix was adopted as SPEC amendment A-C12, post hoc and disclosed: templates 21a8084 plus the gapfiller's reversals, with both phenotype passes rerun on ModelSEEDpy pinned to the pre-registered commit; C12 passes on the rerun (0 gated truth rows, 0 of 8,614 rows gated), so the leave-genus-out artefact is valid under the amendment. Next: push the revised manuscript branch, re-run the real-amplicon deployment at record depth 100 (it still uses the earlier depth and is labelled so in the paper), resolve the two open faults on the audit slide, and close the loop to flux by propagating probability-weighted genomes through community prFBA and validating against paired metagenomes.</a:t>
+              <a:t>Four decisions are made. First, one selection rule: the exact-tie union is used throughout the paper and the deck; the legacy (ordered) reducer stays a user option and appears only in the labelled depth-20 versus depth-100 comparisons. Second, the GTDB accession map is built but deferred to future work, because wiring it in changes which genomes a GTDB hit selects. Third, the ModelSEED template pull requests and the direction-audit issue (ModelSEED/ModelSEEDTemplates#10) were filed on 2026-10-27. Fourth, the C12 fix was adopted as SPEC amendment A-C12, post hoc and disclosed: templates 21a8084 plus the gapfiller's reversals, with both phenotype passes rerun on ModelSEEDpy pinned to the pre-registered commit; amendment A-C13 then reran both passes on ModelSEEDpy c2e31a0, which fixes the builder's demand reactions and an ATP-correction step that could undo its own loop filter; C12 passes on the rerun (0 gated truth rows, 0 of 8,614 rows gated), so the leave-genus-out artefact is valid under the amendment. Next: push the revised manuscript branch, re-run the real-amplicon deployment at record depth 100 (it still uses the earlier depth and is labelled so in the paper), resolve the two open faults on the audit slide, and close the loop to flux by propagating probability-weighted genomes through community prFBA and validating against paired metagenomes.</a:t>
             </a:r>
           </a:p>
         </p:txBody>
@@ -18661,7 +18661,7 @@
                 </a:solidFill>
                 <a:latin typeface="Calibri"/>
               </a:rPr>
-              <a:t>0 of 8,614 rows gated · 49 before amendment A-C12</a:t>
+              <a:t>0 of 8,614 rows gated · 49 before the amendments</a:t>
             </a:r>
           </a:p>
         </p:txBody>
@@ -22302,7 +22302,7 @@
                 </a:solidFill>
                 <a:latin typeface="Calibri"/>
               </a:rPr>
-              <a:t>ModelSEEDTemplates 21a8084, validated first on the 20 affected genomes · run 2026-10-27/28, ModelSEEDpy pinned at the pre-registered commit</a:t>
+              <a:t>ModelSEEDTemplates 21a8084, validated first on the 20 affected genomes · rerun 2026-10-29 on ModelSEEDpy c2e31a0 (A-C13)</a:t>
             </a:r>
           </a:p>
         </p:txBody>
@@ -32800,7 +32800,7 @@
                           </a:solidFill>
                           <a:latin typeface="Calibri"/>
                         </a:rPr>
-                        <a:t>applied in A-C12</a:t>
+                        <a:t>fixed · PR ready</a:t>
                       </a:r>
                     </a:p>
                   </a:txBody>
@@ -32829,7 +32829,7 @@
                           </a:solidFill>
                           <a:latin typeface="Calibri"/>
                         </a:rPr>
-                        <a:t>ModelSEEDpy moved under the first C12 run</a:t>
+                        <a:t>ModelSEEDpy builds free demand sources</a:t>
                       </a:r>
                     </a:p>
                   </a:txBody>
@@ -32856,7 +32856,7 @@
                           </a:solidFill>
                           <a:latin typeface="Calibri"/>
                         </a:rPr>
-                        <a:t>pinned, rerun</a:t>
+                        <a:t>rerun on the fix (A-C13)</a:t>
                       </a:r>
                     </a:p>
                   </a:txBody>
